--- a/assets/TCS349/Unit-2/Lecture9_Security_Privacy_Balance_Review.pptx
+++ b/assets/TCS349/Unit-2/Lecture9_Security_Privacy_Balance_Review.pptx
@@ -4,6 +4,9 @@
   <p:sldMasterIdLst>
     <p:sldMasterId id="2147483648" r:id="rId1"/>
   </p:sldMasterIdLst>
+  <p:notesMasterIdLst>
+    <p:notesMasterId r:id="rId11"/>
+  </p:notesMasterIdLst>
   <p:sldIdLst>
     <p:sldId id="256" r:id="rId2"/>
     <p:sldId id="257" r:id="rId3"/>
@@ -14,11 +17,7 @@
     <p:sldId id="262" r:id="rId8"/>
     <p:sldId id="263" r:id="rId9"/>
     <p:sldId id="264" r:id="rId10"/>
-    <p:sldId id="265" r:id="rId11"/>
   </p:sldIdLst>
-  <p:notesMasterIdLst>
-    <p:notesMasterId r:id="rId12"/>
-  </p:notesMasterIdLst>
   <p:sldSz cx="12192000" cy="6858000"/>
   <p:notesSz cx="6858000" cy="12192000"/>
   <p:defaultTextStyle>
@@ -113,6 +112,11 @@
       </a:defRPr>
     </a:lvl9pPr>
   </p:defaultTextStyle>
+  <p:extLst>
+    <p:ext uri="{EFAFB233-063F-42B5-8137-9DF3F51BA10A}">
+      <p15:sldGuideLst xmlns:p15="http://schemas.microsoft.com/office/powerpoint/2012/main"/>
+    </p:ext>
+  </p:extLst>
 </p:presentation>
 </file>
 
@@ -138,234 +142,10 @@
           <a:chExt cx="0" cy="0"/>
         </a:xfrm>
       </p:grpSpPr>
-      <p:sp>
-        <p:nvSpPr>
-          <p:cNvPr id="2" name="Header Placeholder 1"/>
-          <p:cNvSpPr>
-            <a:spLocks noGrp="1"/>
-          </p:cNvSpPr>
-          <p:nvPr>
-            <p:ph type="hdr" sz="quarter"/>
-          </p:nvPr>
-        </p:nvSpPr>
-        <p:spPr>
-          <a:xfrm>
-            <a:off x="0" y="0"/>
-            <a:ext cx="2971800" cy="458788"/>
-          </a:xfrm>
-          <a:prstGeom prst="rect">
-            <a:avLst/>
-          </a:prstGeom>
-        </p:spPr>
-        <p:txBody>
-          <a:bodyPr vert="horz" lIns="91440" tIns="45720" rIns="91440" bIns="45720" rtlCol="0"/>
-          <a:lstStyle>
-            <a:lvl1pPr algn="l">
-              <a:defRPr sz="1200"/>
-            </a:lvl1pPr>
-          </a:lstStyle>
-          <a:p>
-            <a:endParaRPr lang="en-US"/>
-          </a:p>
-        </p:txBody>
-      </p:sp>
-      <p:sp>
-        <p:nvSpPr>
-          <p:cNvPr id="3" name="Date Placeholder 2"/>
-          <p:cNvSpPr>
-            <a:spLocks noGrp="1"/>
-          </p:cNvSpPr>
-          <p:nvPr>
-            <p:ph type="dt" idx="1"/>
-          </p:nvPr>
-        </p:nvSpPr>
-        <p:spPr>
-          <a:xfrm>
-            <a:off x="3884613" y="0"/>
-            <a:ext cx="2971800" cy="458788"/>
-          </a:xfrm>
-          <a:prstGeom prst="rect">
-            <a:avLst/>
-          </a:prstGeom>
-        </p:spPr>
-        <p:txBody>
-          <a:bodyPr vert="horz" lIns="91440" tIns="45720" rIns="91440" bIns="45720" rtlCol="0"/>
-          <a:lstStyle>
-            <a:lvl1pPr algn="r">
-              <a:defRPr sz="1200"/>
-            </a:lvl1pPr>
-          </a:lstStyle>
-          <a:p>
-            <a:fld id="{5282F153-3F37-0F45-9E97-73ACFA13230C}" type="datetimeFigureOut">
-              <a:rPr lang="en-US"/>
-              <a:t>7/23/19</a:t>
-            </a:fld>
-            <a:endParaRPr lang="en-US"/>
-          </a:p>
-        </p:txBody>
-      </p:sp>
-      <p:sp>
-        <p:nvSpPr>
-          <p:cNvPr id="4" name="Slide Image Placeholder 3"/>
-          <p:cNvSpPr>
-            <a:spLocks noGrp="1" noRot="1" noChangeAspect="1"/>
-          </p:cNvSpPr>
-          <p:nvPr>
-            <p:ph type="sldImg" idx="2"/>
-          </p:nvPr>
-        </p:nvSpPr>
-        <p:spPr>
-          <a:xfrm>
-            <a:off x="685800" y="1143000"/>
-            <a:ext cx="5486400" cy="3086100"/>
-          </a:xfrm>
-          <a:prstGeom prst="rect">
-            <a:avLst/>
-          </a:prstGeom>
-          <a:noFill/>
-          <a:ln w="12700">
-            <a:solidFill>
-              <a:prstClr val="black"/>
-            </a:solidFill>
-          </a:ln>
-        </p:spPr>
-        <p:txBody>
-          <a:bodyPr vert="horz" lIns="91440" tIns="45720" rIns="91440" bIns="45720" rtlCol="0" anchor="ctr"/>
-          <a:lstStyle/>
-          <a:p>
-            <a:endParaRPr lang="en-US"/>
-          </a:p>
-        </p:txBody>
-      </p:sp>
-      <p:sp>
-        <p:nvSpPr>
-          <p:cNvPr id="5" name="Notes Placeholder 4"/>
-          <p:cNvSpPr>
-            <a:spLocks noGrp="1"/>
-          </p:cNvSpPr>
-          <p:nvPr>
-            <p:ph type="body" sz="quarter" idx="3"/>
-          </p:nvPr>
-        </p:nvSpPr>
-        <p:spPr>
-          <a:xfrm>
-            <a:off x="685800" y="4400550"/>
-            <a:ext cx="5486400" cy="3600450"/>
-          </a:xfrm>
-          <a:prstGeom prst="rect">
-            <a:avLst/>
-          </a:prstGeom>
-        </p:spPr>
-        <p:txBody>
-          <a:bodyPr vert="horz" lIns="91440" tIns="45720" rIns="91440" bIns="45720" rtlCol="0"/>
-          <a:lstStyle/>
-          <a:p>
-            <a:pPr lvl="0"/>
-            <a:r>
-              <a:rPr lang="en-US"/>
-              <a:t>Click to edit Master text styles</a:t>
-            </a:r>
-          </a:p>
-          <a:p>
-            <a:pPr lvl="1"/>
-            <a:r>
-              <a:rPr lang="en-US"/>
-              <a:t>Second level</a:t>
-            </a:r>
-          </a:p>
-          <a:p>
-            <a:pPr lvl="2"/>
-            <a:r>
-              <a:rPr lang="en-US"/>
-              <a:t>Third level</a:t>
-            </a:r>
-          </a:p>
-          <a:p>
-            <a:pPr lvl="3"/>
-            <a:r>
-              <a:rPr lang="en-US"/>
-              <a:t>Fourth level</a:t>
-            </a:r>
-          </a:p>
-          <a:p>
-            <a:pPr lvl="4"/>
-            <a:r>
-              <a:rPr lang="en-US"/>
-              <a:t>Fifth level</a:t>
-            </a:r>
-          </a:p>
-        </p:txBody>
-      </p:sp>
-      <p:sp>
-        <p:nvSpPr>
-          <p:cNvPr id="6" name="Footer Placeholder 5"/>
-          <p:cNvSpPr>
-            <a:spLocks noGrp="1"/>
-          </p:cNvSpPr>
-          <p:nvPr>
-            <p:ph type="ftr" sz="quarter" idx="4"/>
-          </p:nvPr>
-        </p:nvSpPr>
-        <p:spPr>
-          <a:xfrm>
-            <a:off x="0" y="8685213"/>
-            <a:ext cx="2971800" cy="458787"/>
-          </a:xfrm>
-          <a:prstGeom prst="rect">
-            <a:avLst/>
-          </a:prstGeom>
-        </p:spPr>
-        <p:txBody>
-          <a:bodyPr vert="horz" lIns="91440" tIns="45720" rIns="91440" bIns="45720" rtlCol="0" anchor="b"/>
-          <a:lstStyle>
-            <a:lvl1pPr algn="l">
-              <a:defRPr sz="1200"/>
-            </a:lvl1pPr>
-          </a:lstStyle>
-          <a:p>
-            <a:endParaRPr lang="en-US"/>
-          </a:p>
-        </p:txBody>
-      </p:sp>
-      <p:sp>
-        <p:nvSpPr>
-          <p:cNvPr id="7" name="Slide Number Placeholder 6"/>
-          <p:cNvSpPr>
-            <a:spLocks noGrp="1"/>
-          </p:cNvSpPr>
-          <p:nvPr>
-            <p:ph type="sldNum" sz="quarter" idx="5"/>
-          </p:nvPr>
-        </p:nvSpPr>
-        <p:spPr>
-          <a:xfrm>
-            <a:off x="3884613" y="8685213"/>
-            <a:ext cx="2971800" cy="458787"/>
-          </a:xfrm>
-          <a:prstGeom prst="rect">
-            <a:avLst/>
-          </a:prstGeom>
-        </p:spPr>
-        <p:txBody>
-          <a:bodyPr vert="horz" lIns="91440" tIns="45720" rIns="91440" bIns="45720" rtlCol="0" anchor="b"/>
-          <a:lstStyle>
-            <a:lvl1pPr algn="r">
-              <a:defRPr sz="1200"/>
-            </a:lvl1pPr>
-          </a:lstStyle>
-          <a:p>
-            <a:fld id="{CE5E9CC1-C706-0F49-92D6-E571CC5EEA8F}" type="slidenum">
-              <a:rPr lang="en-US"/>
-              <a:t>‹#›</a:t>
-            </a:fld>
-            <a:endParaRPr lang="en-US"/>
-          </a:p>
-        </p:txBody>
-      </p:sp>
     </p:spTree>
     <p:extLst>
       <p:ext uri="{BB962C8B-B14F-4D97-AF65-F5344CB8AC3E}">
-        <p14:creationId xmlns:p14="http://schemas.microsoft.com/office/powerpoint/2010/main" val="1024086991"/>
+        <p14:creationId xmlns:p14="http://schemas.microsoft.com/office/powerpoint/2010/main" val="3132586525"/>
       </p:ext>
     </p:extLst>
   </p:cSld>
@@ -509,10 +289,6 @@
           <a:bodyPr/>
           <a:lstStyle/>
           <a:p>
-            <a:r>
-              <a:rPr lang="en-US" dirty="0"/>
-              <a:t/>
-            </a:r>
             <a:endParaRPr lang="en-US" dirty="0"/>
           </a:p>
         </p:txBody>
@@ -535,94 +311,6 @@
             <a:fld id="{F7021451-1387-4CA6-816F-3879F97B5CBC}" type="slidenum">
               <a:rPr lang="en-US"/>
               <a:t>1</a:t>
-            </a:fld>
-            <a:endParaRPr lang="en-US"/>
-          </a:p>
-        </p:txBody>
-      </p:sp>
-    </p:spTree>
-    <p:extLst>
-      <p:ext uri="{BB962C8B-B14F-4D97-AF65-F5344CB8AC3E}">
-        <p14:creationId xmlns:p14="http://schemas.microsoft.com/office/powerpoint/2010/main" val="1024086991"/>
-      </p:ext>
-    </p:extLst>
-  </p:cSld>
-  <p:clrMapOvr>
-    <a:masterClrMapping/>
-  </p:clrMapOvr>
-</p:notes>
-</file>
-
-<file path=ppt/notesSlides/notesSlide10.xml><?xml version="1.0" encoding="utf-8"?>
-<p:notes xmlns:a="http://schemas.openxmlformats.org/drawingml/2006/main" xmlns:r="http://schemas.openxmlformats.org/officeDocument/2006/relationships" xmlns:p="http://schemas.openxmlformats.org/presentationml/2006/main">
-  <p:cSld>
-    <p:spTree>
-      <p:nvGrpSpPr>
-        <p:cNvPr id="1" name=""/>
-        <p:cNvGrpSpPr/>
-        <p:nvPr/>
-      </p:nvGrpSpPr>
-      <p:grpSpPr>
-        <a:xfrm>
-          <a:off x="0" y="0"/>
-          <a:ext cx="0" cy="0"/>
-          <a:chOff x="0" y="0"/>
-          <a:chExt cx="0" cy="0"/>
-        </a:xfrm>
-      </p:grpSpPr>
-      <p:sp>
-        <p:nvSpPr>
-          <p:cNvPr id="2" name="Slide Image Placeholder 1"/>
-          <p:cNvSpPr>
-            <a:spLocks noGrp="1" noRot="1" noChangeAspect="1"/>
-          </p:cNvSpPr>
-          <p:nvPr>
-            <p:ph type="sldImg"/>
-          </p:nvPr>
-        </p:nvSpPr>
-        <p:spPr/>
-      </p:sp>
-      <p:sp>
-        <p:nvSpPr>
-          <p:cNvPr id="3" name="Notes Placeholder 2"/>
-          <p:cNvSpPr>
-            <a:spLocks noGrp="1"/>
-          </p:cNvSpPr>
-          <p:nvPr>
-            <p:ph type="body" idx="1"/>
-          </p:nvPr>
-        </p:nvSpPr>
-        <p:spPr/>
-        <p:txBody>
-          <a:bodyPr/>
-          <a:lstStyle/>
-          <a:p>
-            <a:r>
-              <a:rPr lang="en-US" dirty="0"/>
-              <a:t/>
-            </a:r>
-            <a:endParaRPr lang="en-US" dirty="0"/>
-          </a:p>
-        </p:txBody>
-      </p:sp>
-      <p:sp>
-        <p:nvSpPr>
-          <p:cNvPr id="4" name="Slide Number Placeholder 3"/>
-          <p:cNvSpPr>
-            <a:spLocks noGrp="1"/>
-          </p:cNvSpPr>
-          <p:nvPr>
-            <p:ph type="sldNum" sz="quarter" idx="10"/>
-          </p:nvPr>
-        </p:nvSpPr>
-        <p:spPr/>
-        <p:txBody>
-          <a:bodyPr/>
-          <a:lstStyle/>
-          <a:p>
-            <a:fld id="{F7021451-1387-4CA6-816F-3879F97B5CBC}" type="slidenum">
-              <a:rPr lang="en-US"/>
-              <a:t>10</a:t>
             </a:fld>
             <a:endParaRPr lang="en-US"/>
           </a:p>
@@ -685,10 +373,6 @@
           <a:bodyPr/>
           <a:lstStyle/>
           <a:p>
-            <a:r>
-              <a:rPr lang="en-US" dirty="0"/>
-              <a:t/>
-            </a:r>
             <a:endParaRPr lang="en-US" dirty="0"/>
           </a:p>
         </p:txBody>
@@ -773,10 +457,6 @@
           <a:bodyPr/>
           <a:lstStyle/>
           <a:p>
-            <a:r>
-              <a:rPr lang="en-US" dirty="0"/>
-              <a:t/>
-            </a:r>
             <a:endParaRPr lang="en-US" dirty="0"/>
           </a:p>
         </p:txBody>
@@ -861,10 +541,6 @@
           <a:bodyPr/>
           <a:lstStyle/>
           <a:p>
-            <a:r>
-              <a:rPr lang="en-US" dirty="0"/>
-              <a:t/>
-            </a:r>
             <a:endParaRPr lang="en-US" dirty="0"/>
           </a:p>
         </p:txBody>
@@ -949,10 +625,6 @@
           <a:bodyPr/>
           <a:lstStyle/>
           <a:p>
-            <a:r>
-              <a:rPr lang="en-US" dirty="0"/>
-              <a:t/>
-            </a:r>
             <a:endParaRPr lang="en-US" dirty="0"/>
           </a:p>
         </p:txBody>
@@ -1037,10 +709,6 @@
           <a:bodyPr/>
           <a:lstStyle/>
           <a:p>
-            <a:r>
-              <a:rPr lang="en-US" dirty="0"/>
-              <a:t/>
-            </a:r>
             <a:endParaRPr lang="en-US" dirty="0"/>
           </a:p>
         </p:txBody>
@@ -1125,10 +793,6 @@
           <a:bodyPr/>
           <a:lstStyle/>
           <a:p>
-            <a:r>
-              <a:rPr lang="en-US" dirty="0"/>
-              <a:t/>
-            </a:r>
             <a:endParaRPr lang="en-US" dirty="0"/>
           </a:p>
         </p:txBody>
@@ -1213,10 +877,6 @@
           <a:bodyPr/>
           <a:lstStyle/>
           <a:p>
-            <a:r>
-              <a:rPr lang="en-US" dirty="0"/>
-              <a:t/>
-            </a:r>
             <a:endParaRPr lang="en-US" dirty="0"/>
           </a:p>
         </p:txBody>
@@ -1301,10 +961,6 @@
           <a:bodyPr/>
           <a:lstStyle/>
           <a:p>
-            <a:r>
-              <a:rPr lang="en-US" dirty="0"/>
-              <a:t/>
-            </a:r>
             <a:endParaRPr lang="en-US" dirty="0"/>
           </a:p>
         </p:txBody>
@@ -1378,6 +1034,11 @@
 <file path=ppt/slideMasters/slideMaster1.xml><?xml version="1.0" encoding="utf-8"?>
 <p:sldMaster xmlns:a="http://schemas.openxmlformats.org/drawingml/2006/main" xmlns:r="http://schemas.openxmlformats.org/officeDocument/2006/relationships" xmlns:p="http://schemas.openxmlformats.org/presentationml/2006/main">
   <p:cSld>
+    <p:bg>
+      <p:bgRef idx="1001">
+        <a:schemeClr val="bg1"/>
+      </p:bgRef>
+    </p:bg>
     <p:spTree>
       <p:nvGrpSpPr>
         <p:cNvPr id="1" name=""/>
@@ -1660,6 +1321,7 @@
         <a:solidFill>
           <a:srgbClr val="FFFFFF"/>
         </a:solidFill>
+        <a:effectLst/>
       </p:bgPr>
     </p:bg>
     <p:spTree>
@@ -1700,6 +1362,13 @@
             <a:prstDash val="solid"/>
           </a:ln>
         </p:spPr>
+        <p:txBody>
+          <a:bodyPr/>
+          <a:lstStyle/>
+          <a:p>
+            <a:endParaRPr lang="en-US"/>
+          </a:p>
+        </p:txBody>
       </p:sp>
       <p:sp>
         <p:nvSpPr>
@@ -1725,6 +1394,13 @@
             <a:prstDash val="solid"/>
           </a:ln>
         </p:spPr>
+        <p:txBody>
+          <a:bodyPr/>
+          <a:lstStyle/>
+          <a:p>
+            <a:endParaRPr lang="en-US"/>
+          </a:p>
+        </p:txBody>
       </p:sp>
       <p:sp>
         <p:nvSpPr>
@@ -1747,7 +1423,7 @@
           <a:bodyPr wrap="square" lIns="0" tIns="0" rIns="0" bIns="0" rtlCol="0" anchor="ctr"/>
           <a:lstStyle/>
           <a:p>
-            <a:pPr indent="0" marL="0">
+            <a:pPr marL="0" indent="0">
               <a:buNone/>
             </a:pPr>
             <a:r>
@@ -1786,7 +1462,7 @@
           <a:bodyPr wrap="square" lIns="0" tIns="0" rIns="0" bIns="0" rtlCol="0" anchor="ctr"/>
           <a:lstStyle/>
           <a:p>
-            <a:pPr indent="0" marL="0">
+            <a:pPr marL="0" indent="0">
               <a:buNone/>
             </a:pPr>
             <a:r>
@@ -1825,7 +1501,7 @@
           <a:bodyPr wrap="square" lIns="0" tIns="0" rIns="0" bIns="0" rtlCol="0" anchor="ctr"/>
           <a:lstStyle/>
           <a:p>
-            <a:pPr indent="0" marL="0">
+            <a:pPr marL="0" indent="0">
               <a:buNone/>
             </a:pPr>
             <a:r>
@@ -1842,7 +1518,7 @@
             <a:endParaRPr lang="en-US" sz="2400" dirty="0"/>
           </a:p>
           <a:p>
-            <a:pPr indent="0" marL="0">
+            <a:pPr marL="0" indent="0">
               <a:buNone/>
             </a:pPr>
             <a:r>
@@ -1881,7 +1557,7 @@
           <a:bodyPr wrap="square" lIns="0" tIns="0" rIns="0" bIns="0" rtlCol="0" anchor="t"/>
           <a:lstStyle/>
           <a:p>
-            <a:pPr indent="0" marL="0">
+            <a:pPr marL="0" indent="0">
               <a:buNone/>
             </a:pPr>
             <a:r>
@@ -1920,9 +1596,20 @@
           <a:bodyPr wrap="square" lIns="0" tIns="0" rIns="0" bIns="0" rtlCol="0" anchor="ctr"/>
           <a:lstStyle/>
           <a:p>
-            <a:pPr indent="0" marL="0">
-              <a:buNone/>
-            </a:pPr>
+            <a:pPr marL="0" indent="0">
+              <a:buNone/>
+            </a:pPr>
+            <a:r>
+              <a:rPr lang="en-US" dirty="0">
+                <a:solidFill>
+                  <a:srgbClr val="191919"/>
+                </a:solidFill>
+                <a:latin typeface="Times New Roman" pitchFamily="34" charset="0"/>
+                <a:ea typeface="Times New Roman" pitchFamily="34" charset="-122"/>
+                <a:cs typeface="Times New Roman" pitchFamily="34" charset="-120"/>
+              </a:rPr>
+              <a:t>M</a:t>
+            </a:r>
             <a:r>
               <a:rPr lang="en-US" sz="1800" dirty="0">
                 <a:solidFill>
@@ -1932,12 +1619,12 @@
                 <a:ea typeface="Times New Roman" pitchFamily="34" charset="-122"/>
                 <a:cs typeface="Times New Roman" pitchFamily="34" charset="-120"/>
               </a:rPr>
-              <a:t>Dr. Manoj Kaushik</a:t>
+              <a:t>r. Manoj Kaushik</a:t>
             </a:r>
             <a:endParaRPr lang="en-US" sz="1800" dirty="0"/>
           </a:p>
           <a:p>
-            <a:pPr indent="0" marL="0">
+            <a:pPr marL="0" indent="0">
               <a:buNone/>
             </a:pPr>
             <a:r>
@@ -1954,7 +1641,7 @@
             <a:endParaRPr lang="en-US" sz="1800" dirty="0"/>
           </a:p>
           <a:p>
-            <a:pPr indent="0" marL="0">
+            <a:pPr marL="0" indent="0">
               <a:buNone/>
             </a:pPr>
             <a:r>
@@ -1998,17 +1685,24 @@
             <a:prstDash val="solid"/>
           </a:ln>
         </p:spPr>
+        <p:txBody>
+          <a:bodyPr/>
+          <a:lstStyle/>
+          <a:p>
+            <a:endParaRPr lang="en-US"/>
+          </a:p>
+        </p:txBody>
       </p:sp>
       <p:pic>
         <p:nvPicPr>
-          <p:cNvPr id="10" name="Image 0" descr="/home/claude/work10/icon10_security.png">    </p:cNvPr>
+          <p:cNvPr id="10" name="Image 0" descr="/home/claude/work10/icon10_security.png"/>
           <p:cNvPicPr>
             <a:picLocks noChangeAspect="1"/>
           </p:cNvPicPr>
           <p:nvPr/>
         </p:nvPicPr>
         <p:blipFill>
-          <a:blip r:embed="rId1"/>
+          <a:blip r:embed="rId3"/>
           <a:stretch>
             <a:fillRect/>
           </a:stretch>
@@ -2044,7 +1738,7 @@
           <a:bodyPr wrap="square" lIns="0" tIns="0" rIns="0" bIns="0" rtlCol="0" anchor="t"/>
           <a:lstStyle/>
           <a:p>
-            <a:pPr algn="ctr" indent="0" marL="0">
+            <a:pPr marL="0" indent="0" algn="ctr">
               <a:buNone/>
             </a:pPr>
             <a:r>
@@ -2088,17 +1782,24 @@
             <a:prstDash val="solid"/>
           </a:ln>
         </p:spPr>
+        <p:txBody>
+          <a:bodyPr/>
+          <a:lstStyle/>
+          <a:p>
+            <a:endParaRPr lang="en-US"/>
+          </a:p>
+        </p:txBody>
       </p:sp>
       <p:pic>
         <p:nvPicPr>
-          <p:cNvPr id="13" name="Image 1" descr="/home/claude/work10/icon10_privacy.png">    </p:cNvPr>
+          <p:cNvPr id="13" name="Image 1" descr="/home/claude/work10/icon10_privacy.png"/>
           <p:cNvPicPr>
             <a:picLocks noChangeAspect="1"/>
           </p:cNvPicPr>
           <p:nvPr/>
         </p:nvPicPr>
         <p:blipFill>
-          <a:blip r:embed="rId2"/>
+          <a:blip r:embed="rId4"/>
           <a:stretch>
             <a:fillRect/>
           </a:stretch>
@@ -2134,7 +1835,7 @@
           <a:bodyPr wrap="square" lIns="0" tIns="0" rIns="0" bIns="0" rtlCol="0" anchor="t"/>
           <a:lstStyle/>
           <a:p>
-            <a:pPr algn="ctr" indent="0" marL="0">
+            <a:pPr marL="0" indent="0" algn="ctr">
               <a:buNone/>
             </a:pPr>
             <a:r>
@@ -2178,17 +1879,24 @@
             <a:prstDash val="solid"/>
           </a:ln>
         </p:spPr>
+        <p:txBody>
+          <a:bodyPr/>
+          <a:lstStyle/>
+          <a:p>
+            <a:endParaRPr lang="en-US"/>
+          </a:p>
+        </p:txBody>
       </p:sp>
       <p:pic>
         <p:nvPicPr>
-          <p:cNvPr id="16" name="Image 2" descr="/home/claude/work10/icon10_balance.png">    </p:cNvPr>
+          <p:cNvPr id="16" name="Image 2" descr="/home/claude/work10/icon10_balance.png"/>
           <p:cNvPicPr>
             <a:picLocks noChangeAspect="1"/>
           </p:cNvPicPr>
           <p:nvPr/>
         </p:nvPicPr>
         <p:blipFill>
-          <a:blip r:embed="rId3"/>
+          <a:blip r:embed="rId5"/>
           <a:stretch>
             <a:fillRect/>
           </a:stretch>
@@ -2224,7 +1932,7 @@
           <a:bodyPr wrap="square" lIns="0" tIns="0" rIns="0" bIns="0" rtlCol="0" anchor="t"/>
           <a:lstStyle/>
           <a:p>
-            <a:pPr algn="ctr" indent="0" marL="0">
+            <a:pPr marL="0" indent="0" algn="ctr">
               <a:buNone/>
             </a:pPr>
             <a:r>
@@ -2268,17 +1976,24 @@
             <a:prstDash val="solid"/>
           </a:ln>
         </p:spPr>
+        <p:txBody>
+          <a:bodyPr/>
+          <a:lstStyle/>
+          <a:p>
+            <a:endParaRPr lang="en-US"/>
+          </a:p>
+        </p:txBody>
       </p:sp>
       <p:pic>
         <p:nvPicPr>
-          <p:cNvPr id="19" name="Image 3" descr="/home/claude/work10/icon10_review.png">    </p:cNvPr>
+          <p:cNvPr id="19" name="Image 3" descr="/home/claude/work10/icon10_review.png"/>
           <p:cNvPicPr>
             <a:picLocks noChangeAspect="1"/>
           </p:cNvPicPr>
           <p:nvPr/>
         </p:nvPicPr>
         <p:blipFill>
-          <a:blip r:embed="rId4"/>
+          <a:blip r:embed="rId6"/>
           <a:stretch>
             <a:fillRect/>
           </a:stretch>
@@ -2314,7 +2029,7 @@
           <a:bodyPr wrap="square" lIns="0" tIns="0" rIns="0" bIns="0" rtlCol="0" anchor="t"/>
           <a:lstStyle/>
           <a:p>
-            <a:pPr algn="ctr" indent="0" marL="0">
+            <a:pPr marL="0" indent="0" algn="ctr">
               <a:buNone/>
             </a:pPr>
             <a:r>
@@ -2353,7 +2068,7 @@
           <a:bodyPr wrap="square" lIns="0" tIns="0" rIns="0" bIns="0" rtlCol="0" anchor="ctr"/>
           <a:lstStyle/>
           <a:p>
-            <a:pPr algn="ctr" indent="0" marL="0">
+            <a:pPr marL="0" indent="0" algn="ctr">
               <a:buNone/>
             </a:pPr>
             <a:r>
@@ -2379,14 +2094,15 @@
 </p:sld>
 </file>
 
-<file path=ppt/slides/slide10.xml><?xml version="1.0" encoding="utf-8"?>
+<file path=ppt/slides/slide2.xml><?xml version="1.0" encoding="utf-8"?>
 <p:sld xmlns:a="http://schemas.openxmlformats.org/drawingml/2006/main" xmlns:r="http://schemas.openxmlformats.org/officeDocument/2006/relationships" xmlns:p="http://schemas.openxmlformats.org/presentationml/2006/main">
-  <p:cSld name="Slide 10">
+  <p:cSld name="Slide 2">
     <p:bg>
       <p:bgPr>
         <a:solidFill>
           <a:srgbClr val="FFFFFF"/>
         </a:solidFill>
+        <a:effectLst/>
       </p:bgPr>
     </p:bg>
     <p:spTree>
@@ -2427,6 +2143,13 @@
             <a:prstDash val="solid"/>
           </a:ln>
         </p:spPr>
+        <p:txBody>
+          <a:bodyPr/>
+          <a:lstStyle/>
+          <a:p>
+            <a:endParaRPr lang="en-US"/>
+          </a:p>
+        </p:txBody>
       </p:sp>
       <p:sp>
         <p:nvSpPr>
@@ -2452,6 +2175,13 @@
             <a:prstDash val="solid"/>
           </a:ln>
         </p:spPr>
+        <p:txBody>
+          <a:bodyPr/>
+          <a:lstStyle/>
+          <a:p>
+            <a:endParaRPr lang="en-US"/>
+          </a:p>
+        </p:txBody>
       </p:sp>
       <p:sp>
         <p:nvSpPr>
@@ -2474,7 +2204,7 @@
           <a:bodyPr wrap="square" lIns="0" tIns="0" rIns="0" bIns="0" rtlCol="0" anchor="ctr"/>
           <a:lstStyle/>
           <a:p>
-            <a:pPr indent="0" marL="0">
+            <a:pPr marL="0" indent="0">
               <a:buNone/>
             </a:pPr>
             <a:r>
@@ -2513,7 +2243,7 @@
           <a:bodyPr wrap="square" lIns="0" tIns="0" rIns="0" bIns="0" rtlCol="0" anchor="ctr"/>
           <a:lstStyle/>
           <a:p>
-            <a:pPr algn="r" indent="0" marL="0">
+            <a:pPr marL="0" indent="0" algn="r">
               <a:buNone/>
             </a:pPr>
             <a:r>
@@ -2552,7 +2282,7 @@
           <a:bodyPr wrap="square" lIns="0" tIns="0" rIns="0" bIns="0" rtlCol="0" anchor="ctr"/>
           <a:lstStyle/>
           <a:p>
-            <a:pPr indent="0" marL="0">
+            <a:pPr marL="0" indent="0">
               <a:buNone/>
             </a:pPr>
             <a:r>
@@ -2564,7 +2294,7 @@
                 <a:ea typeface="Times New Roman" pitchFamily="34" charset="-122"/>
                 <a:cs typeface="Times New Roman" pitchFamily="34" charset="-120"/>
               </a:rPr>
-              <a:t>9. Looking Ahead to Unit III</a:t>
+              <a:t>1. The Security-Privacy Tension in AI</a:t>
             </a:r>
             <a:endParaRPr lang="en-US" sz="2300" dirty="0"/>
           </a:p>
@@ -2591,7 +2321,7 @@
           <a:bodyPr wrap="square" lIns="50800" tIns="50800" rIns="50800" bIns="50800" rtlCol="0" anchor="t"/>
           <a:lstStyle/>
           <a:p>
-            <a:pPr indent="0" marL="0">
+            <a:pPr marL="0" indent="0">
               <a:buNone/>
             </a:pPr>
             <a:r>
@@ -2603,18 +2333,18 @@
                 <a:ea typeface="Times New Roman" pitchFamily="34" charset="-122"/>
                 <a:cs typeface="Times New Roman" pitchFamily="34" charset="-120"/>
               </a:rPr>
-              <a:t>Unit II has followed one AI system through its full accountability chain: transparent documentation, human oversight, lawful surveillance and protected data.</a:t>
+              <a:t>Security aims to protect systems and data from unauthorised access, misuse or attack.</a:t>
             </a:r>
             <a:endParaRPr lang="en-US" sz="1800" dirty="0"/>
           </a:p>
           <a:p>
-            <a:pPr indent="0" marL="0">
+            <a:pPr marL="0" indent="0">
               <a:buNone/>
             </a:pPr>
             <a:endParaRPr lang="en-US" sz="1800" dirty="0"/>
           </a:p>
           <a:p>
-            <a:pPr indent="0" marL="0">
+            <a:pPr marL="0" indent="0">
               <a:buNone/>
             </a:pPr>
             <a:r>
@@ -2626,18 +2356,18 @@
                 <a:ea typeface="Times New Roman" pitchFamily="34" charset="-122"/>
                 <a:cs typeface="Times New Roman" pitchFamily="34" charset="-120"/>
               </a:rPr>
-              <a:t>Unit III shifts focus from a single system's design to AI's broader footprint on employment, the economy and public policy.</a:t>
+              <a:t>Privacy aims to protect individuals from unwanted collection, use or exposure of their personal data.</a:t>
             </a:r>
             <a:endParaRPr lang="en-US" sz="1800" dirty="0"/>
           </a:p>
           <a:p>
-            <a:pPr indent="0" marL="0">
+            <a:pPr marL="0" indent="0">
               <a:buNone/>
             </a:pPr>
             <a:endParaRPr lang="en-US" sz="1800" dirty="0"/>
           </a:p>
           <a:p>
-            <a:pPr indent="0" marL="0">
+            <a:pPr marL="0" indent="0">
               <a:buNone/>
             </a:pPr>
             <a:r>
@@ -2649,18 +2379,18 @@
                 <a:ea typeface="Times New Roman" pitchFamily="34" charset="-122"/>
                 <a:cs typeface="Times New Roman" pitchFamily="34" charset="-120"/>
               </a:rPr>
-              <a:t>The security-privacy balance explored here reappears at a societal scale in Unit III's discussion of governance and inequality.</a:t>
+              <a:t>The two goals often require different, sometimes opposing, technical choices.</a:t>
             </a:r>
             <a:endParaRPr lang="en-US" sz="1800" dirty="0"/>
           </a:p>
           <a:p>
-            <a:pPr indent="0" marL="0">
+            <a:pPr marL="0" indent="0">
               <a:buNone/>
             </a:pPr>
             <a:endParaRPr lang="en-US" sz="1800" dirty="0"/>
           </a:p>
           <a:p>
-            <a:pPr indent="0" marL="0">
+            <a:pPr marL="0" indent="0">
               <a:buNone/>
             </a:pPr>
             <a:r>
@@ -2672,7 +2402,7 @@
                 <a:ea typeface="Times New Roman" pitchFamily="34" charset="-122"/>
                 <a:cs typeface="Times New Roman" pitchFamily="34" charset="-120"/>
               </a:rPr>
-              <a:t>Unit III opens with AI and employment: task automation, job displacement and changing occupational structures.</a:t>
+              <a:t>Responsible AI treats this as a tension to be actively managed, not a problem with a single correct answer.</a:t>
             </a:r>
             <a:endParaRPr lang="en-US" sz="1800" dirty="0"/>
           </a:p>
@@ -2699,7 +2429,7 @@
           <a:bodyPr wrap="square" lIns="0" tIns="0" rIns="0" bIns="0" rtlCol="0" anchor="ctr"/>
           <a:lstStyle/>
           <a:p>
-            <a:pPr algn="ctr" indent="0" marL="0">
+            <a:pPr marL="0" indent="0" algn="ctr">
               <a:buNone/>
             </a:pPr>
             <a:r>
@@ -2711,7 +2441,7 @@
                 <a:ea typeface="Times New Roman" pitchFamily="34" charset="-122"/>
                 <a:cs typeface="Times New Roman" pitchFamily="34" charset="-120"/>
               </a:rPr>
-              <a:t>10</a:t>
+              <a:t>2</a:t>
             </a:r>
             <a:endParaRPr lang="en-US" sz="1200" dirty="0"/>
           </a:p>
@@ -2725,14 +2455,15 @@
 </p:sld>
 </file>
 
-<file path=ppt/slides/slide2.xml><?xml version="1.0" encoding="utf-8"?>
+<file path=ppt/slides/slide3.xml><?xml version="1.0" encoding="utf-8"?>
 <p:sld xmlns:a="http://schemas.openxmlformats.org/drawingml/2006/main" xmlns:r="http://schemas.openxmlformats.org/officeDocument/2006/relationships" xmlns:p="http://schemas.openxmlformats.org/presentationml/2006/main">
-  <p:cSld name="Slide 2">
+  <p:cSld name="Slide 3">
     <p:bg>
       <p:bgPr>
         <a:solidFill>
           <a:srgbClr val="FFFFFF"/>
         </a:solidFill>
+        <a:effectLst/>
       </p:bgPr>
     </p:bg>
     <p:spTree>
@@ -2773,6 +2504,13 @@
             <a:prstDash val="solid"/>
           </a:ln>
         </p:spPr>
+        <p:txBody>
+          <a:bodyPr/>
+          <a:lstStyle/>
+          <a:p>
+            <a:endParaRPr lang="en-US"/>
+          </a:p>
+        </p:txBody>
       </p:sp>
       <p:sp>
         <p:nvSpPr>
@@ -2798,6 +2536,13 @@
             <a:prstDash val="solid"/>
           </a:ln>
         </p:spPr>
+        <p:txBody>
+          <a:bodyPr/>
+          <a:lstStyle/>
+          <a:p>
+            <a:endParaRPr lang="en-US"/>
+          </a:p>
+        </p:txBody>
       </p:sp>
       <p:sp>
         <p:nvSpPr>
@@ -2820,7 +2565,7 @@
           <a:bodyPr wrap="square" lIns="0" tIns="0" rIns="0" bIns="0" rtlCol="0" anchor="ctr"/>
           <a:lstStyle/>
           <a:p>
-            <a:pPr indent="0" marL="0">
+            <a:pPr marL="0" indent="0">
               <a:buNone/>
             </a:pPr>
             <a:r>
@@ -2859,7 +2604,7 @@
           <a:bodyPr wrap="square" lIns="0" tIns="0" rIns="0" bIns="0" rtlCol="0" anchor="ctr"/>
           <a:lstStyle/>
           <a:p>
-            <a:pPr algn="r" indent="0" marL="0">
+            <a:pPr marL="0" indent="0" algn="r">
               <a:buNone/>
             </a:pPr>
             <a:r>
@@ -2898,7 +2643,7 @@
           <a:bodyPr wrap="square" lIns="0" tIns="0" rIns="0" bIns="0" rtlCol="0" anchor="ctr"/>
           <a:lstStyle/>
           <a:p>
-            <a:pPr indent="0" marL="0">
+            <a:pPr marL="0" indent="0">
               <a:buNone/>
             </a:pPr>
             <a:r>
@@ -2910,7 +2655,7 @@
                 <a:ea typeface="Times New Roman" pitchFamily="34" charset="-122"/>
                 <a:cs typeface="Times New Roman" pitchFamily="34" charset="-120"/>
               </a:rPr>
-              <a:t>1. The Security-Privacy Tension in AI</a:t>
+              <a:t>2. Where Security and Privacy Align</a:t>
             </a:r>
             <a:endParaRPr lang="en-US" sz="2300" dirty="0"/>
           </a:p>
@@ -2937,7 +2682,7 @@
           <a:bodyPr wrap="square" lIns="50800" tIns="50800" rIns="50800" bIns="50800" rtlCol="0" anchor="t"/>
           <a:lstStyle/>
           <a:p>
-            <a:pPr indent="0" marL="0">
+            <a:pPr marL="0" indent="0">
               <a:buNone/>
             </a:pPr>
             <a:r>
@@ -2949,18 +2694,18 @@
                 <a:ea typeface="Times New Roman" pitchFamily="34" charset="-122"/>
                 <a:cs typeface="Times New Roman" pitchFamily="34" charset="-120"/>
               </a:rPr>
-              <a:t>Security aims to protect systems and data from unauthorised access, misuse or attack.</a:t>
+              <a:t>Access control, covered in Lecture 17, serves both goals at once: it protects data from attackers and limits who can see personal information.</a:t>
             </a:r>
             <a:endParaRPr lang="en-US" sz="1800" dirty="0"/>
           </a:p>
           <a:p>
-            <a:pPr indent="0" marL="0">
+            <a:pPr marL="0" indent="0">
               <a:buNone/>
             </a:pPr>
             <a:endParaRPr lang="en-US" sz="1800" dirty="0"/>
           </a:p>
           <a:p>
-            <a:pPr indent="0" marL="0">
+            <a:pPr marL="0" indent="0">
               <a:buNone/>
             </a:pPr>
             <a:r>
@@ -2972,18 +2717,18 @@
                 <a:ea typeface="Times New Roman" pitchFamily="34" charset="-122"/>
                 <a:cs typeface="Times New Roman" pitchFamily="34" charset="-120"/>
               </a:rPr>
-              <a:t>Privacy aims to protect individuals from unwanted collection, use or exposure of their personal data.</a:t>
+              <a:t>Encryption protects data from unauthorised access while also reducing the privacy harm if a breach occurs.</a:t>
             </a:r>
             <a:endParaRPr lang="en-US" sz="1800" dirty="0"/>
           </a:p>
           <a:p>
-            <a:pPr indent="0" marL="0">
+            <a:pPr marL="0" indent="0">
               <a:buNone/>
             </a:pPr>
             <a:endParaRPr lang="en-US" sz="1800" dirty="0"/>
           </a:p>
           <a:p>
-            <a:pPr indent="0" marL="0">
+            <a:pPr marL="0" indent="0">
               <a:buNone/>
             </a:pPr>
             <a:r>
@@ -2995,18 +2740,18 @@
                 <a:ea typeface="Times New Roman" pitchFamily="34" charset="-122"/>
                 <a:cs typeface="Times New Roman" pitchFamily="34" charset="-120"/>
               </a:rPr>
-              <a:t>The two goals often require different, sometimes opposing, technical choices.</a:t>
+              <a:t>Audit logs, from Lecture 12, support both security monitoring and privacy accountability using the same record.</a:t>
             </a:r>
             <a:endParaRPr lang="en-US" sz="1800" dirty="0"/>
           </a:p>
           <a:p>
-            <a:pPr indent="0" marL="0">
+            <a:pPr marL="0" indent="0">
               <a:buNone/>
             </a:pPr>
             <a:endParaRPr lang="en-US" sz="1800" dirty="0"/>
           </a:p>
           <a:p>
-            <a:pPr indent="0" marL="0">
+            <a:pPr marL="0" indent="0">
               <a:buNone/>
             </a:pPr>
             <a:r>
@@ -3018,7 +2763,7 @@
                 <a:ea typeface="Times New Roman" pitchFamily="34" charset="-122"/>
                 <a:cs typeface="Times New Roman" pitchFamily="34" charset="-120"/>
               </a:rPr>
-              <a:t>Responsible AI treats this as a tension to be actively managed, not a problem with a single correct answer.</a:t>
+              <a:t>In these cases, investing in one goal directly strengthens the other.</a:t>
             </a:r>
             <a:endParaRPr lang="en-US" sz="1800" dirty="0"/>
           </a:p>
@@ -3045,7 +2790,7 @@
           <a:bodyPr wrap="square" lIns="0" tIns="0" rIns="0" bIns="0" rtlCol="0" anchor="ctr"/>
           <a:lstStyle/>
           <a:p>
-            <a:pPr algn="ctr" indent="0" marL="0">
+            <a:pPr marL="0" indent="0" algn="ctr">
               <a:buNone/>
             </a:pPr>
             <a:r>
@@ -3057,7 +2802,7 @@
                 <a:ea typeface="Times New Roman" pitchFamily="34" charset="-122"/>
                 <a:cs typeface="Times New Roman" pitchFamily="34" charset="-120"/>
               </a:rPr>
-              <a:t>2</a:t>
+              <a:t>3</a:t>
             </a:r>
             <a:endParaRPr lang="en-US" sz="1200" dirty="0"/>
           </a:p>
@@ -3071,14 +2816,15 @@
 </p:sld>
 </file>
 
-<file path=ppt/slides/slide3.xml><?xml version="1.0" encoding="utf-8"?>
+<file path=ppt/slides/slide4.xml><?xml version="1.0" encoding="utf-8"?>
 <p:sld xmlns:a="http://schemas.openxmlformats.org/drawingml/2006/main" xmlns:r="http://schemas.openxmlformats.org/officeDocument/2006/relationships" xmlns:p="http://schemas.openxmlformats.org/presentationml/2006/main">
-  <p:cSld name="Slide 3">
+  <p:cSld name="Slide 4">
     <p:bg>
       <p:bgPr>
         <a:solidFill>
           <a:srgbClr val="FFFFFF"/>
         </a:solidFill>
+        <a:effectLst/>
       </p:bgPr>
     </p:bg>
     <p:spTree>
@@ -3119,6 +2865,13 @@
             <a:prstDash val="solid"/>
           </a:ln>
         </p:spPr>
+        <p:txBody>
+          <a:bodyPr/>
+          <a:lstStyle/>
+          <a:p>
+            <a:endParaRPr lang="en-US"/>
+          </a:p>
+        </p:txBody>
       </p:sp>
       <p:sp>
         <p:nvSpPr>
@@ -3144,6 +2897,13 @@
             <a:prstDash val="solid"/>
           </a:ln>
         </p:spPr>
+        <p:txBody>
+          <a:bodyPr/>
+          <a:lstStyle/>
+          <a:p>
+            <a:endParaRPr lang="en-US"/>
+          </a:p>
+        </p:txBody>
       </p:sp>
       <p:sp>
         <p:nvSpPr>
@@ -3166,7 +2926,7 @@
           <a:bodyPr wrap="square" lIns="0" tIns="0" rIns="0" bIns="0" rtlCol="0" anchor="ctr"/>
           <a:lstStyle/>
           <a:p>
-            <a:pPr indent="0" marL="0">
+            <a:pPr marL="0" indent="0">
               <a:buNone/>
             </a:pPr>
             <a:r>
@@ -3205,7 +2965,7 @@
           <a:bodyPr wrap="square" lIns="0" tIns="0" rIns="0" bIns="0" rtlCol="0" anchor="ctr"/>
           <a:lstStyle/>
           <a:p>
-            <a:pPr algn="r" indent="0" marL="0">
+            <a:pPr marL="0" indent="0" algn="r">
               <a:buNone/>
             </a:pPr>
             <a:r>
@@ -3244,7 +3004,7 @@
           <a:bodyPr wrap="square" lIns="0" tIns="0" rIns="0" bIns="0" rtlCol="0" anchor="ctr"/>
           <a:lstStyle/>
           <a:p>
-            <a:pPr indent="0" marL="0">
+            <a:pPr marL="0" indent="0">
               <a:buNone/>
             </a:pPr>
             <a:r>
@@ -3256,7 +3016,7 @@
                 <a:ea typeface="Times New Roman" pitchFamily="34" charset="-122"/>
                 <a:cs typeface="Times New Roman" pitchFamily="34" charset="-120"/>
               </a:rPr>
-              <a:t>2. Where Security and Privacy Align</a:t>
+              <a:t>3. Where Security and Privacy Conflict</a:t>
             </a:r>
             <a:endParaRPr lang="en-US" sz="2300" dirty="0"/>
           </a:p>
@@ -3283,7 +3043,7 @@
           <a:bodyPr wrap="square" lIns="50800" tIns="50800" rIns="50800" bIns="50800" rtlCol="0" anchor="t"/>
           <a:lstStyle/>
           <a:p>
-            <a:pPr indent="0" marL="0">
+            <a:pPr marL="0" indent="0">
               <a:buNone/>
             </a:pPr>
             <a:r>
@@ -3295,18 +3055,18 @@
                 <a:ea typeface="Times New Roman" pitchFamily="34" charset="-122"/>
                 <a:cs typeface="Times New Roman" pitchFamily="34" charset="-120"/>
               </a:rPr>
-              <a:t>Access control, covered in Lecture 17, serves both goals at once: it protects data from attackers and limits who can see personal information.</a:t>
+              <a:t>Strong security monitoring often requires collecting more data - such as detailed logs and behavioural signals - which increases privacy exposure.</a:t>
             </a:r>
             <a:endParaRPr lang="en-US" sz="1800" dirty="0"/>
           </a:p>
           <a:p>
-            <a:pPr indent="0" marL="0">
+            <a:pPr marL="0" indent="0">
               <a:buNone/>
             </a:pPr>
             <a:endParaRPr lang="en-US" sz="1800" dirty="0"/>
           </a:p>
           <a:p>
-            <a:pPr indent="0" marL="0">
+            <a:pPr marL="0" indent="0">
               <a:buNone/>
             </a:pPr>
             <a:r>
@@ -3318,18 +3078,18 @@
                 <a:ea typeface="Times New Roman" pitchFamily="34" charset="-122"/>
                 <a:cs typeface="Times New Roman" pitchFamily="34" charset="-120"/>
               </a:rPr>
-              <a:t>Encryption protects data from unauthorised access while also reducing the privacy harm if a breach occurs.</a:t>
+              <a:t>Anonymisation, which protects privacy, can remove information a security team needs to detect and investigate an attack.</a:t>
             </a:r>
             <a:endParaRPr lang="en-US" sz="1800" dirty="0"/>
           </a:p>
           <a:p>
-            <a:pPr indent="0" marL="0">
+            <a:pPr marL="0" indent="0">
               <a:buNone/>
             </a:pPr>
             <a:endParaRPr lang="en-US" sz="1800" dirty="0"/>
           </a:p>
           <a:p>
-            <a:pPr indent="0" marL="0">
+            <a:pPr marL="0" indent="0">
               <a:buNone/>
             </a:pPr>
             <a:r>
@@ -3341,18 +3101,18 @@
                 <a:ea typeface="Times New Roman" pitchFamily="34" charset="-122"/>
                 <a:cs typeface="Times New Roman" pitchFamily="34" charset="-120"/>
               </a:rPr>
-              <a:t>Audit logs, from Lecture 12, support both security monitoring and privacy accountability using the same record.</a:t>
+              <a:t>Facial recognition for building security directly trades individual privacy for a security benefit, as seen in Lecture 15.</a:t>
             </a:r>
             <a:endParaRPr lang="en-US" sz="1800" dirty="0"/>
           </a:p>
           <a:p>
-            <a:pPr indent="0" marL="0">
+            <a:pPr marL="0" indent="0">
               <a:buNone/>
             </a:pPr>
             <a:endParaRPr lang="en-US" sz="1800" dirty="0"/>
           </a:p>
           <a:p>
-            <a:pPr indent="0" marL="0">
+            <a:pPr marL="0" indent="0">
               <a:buNone/>
             </a:pPr>
             <a:r>
@@ -3364,7 +3124,7 @@
                 <a:ea typeface="Times New Roman" pitchFamily="34" charset="-122"/>
                 <a:cs typeface="Times New Roman" pitchFamily="34" charset="-120"/>
               </a:rPr>
-              <a:t>In these cases, investing in one goal directly strengthens the other.</a:t>
+              <a:t>Neither goal should be allowed to fully override the other without a deliberate, justified decision.</a:t>
             </a:r>
             <a:endParaRPr lang="en-US" sz="1800" dirty="0"/>
           </a:p>
@@ -3391,7 +3151,7 @@
           <a:bodyPr wrap="square" lIns="0" tIns="0" rIns="0" bIns="0" rtlCol="0" anchor="ctr"/>
           <a:lstStyle/>
           <a:p>
-            <a:pPr algn="ctr" indent="0" marL="0">
+            <a:pPr marL="0" indent="0" algn="ctr">
               <a:buNone/>
             </a:pPr>
             <a:r>
@@ -3403,7 +3163,7 @@
                 <a:ea typeface="Times New Roman" pitchFamily="34" charset="-122"/>
                 <a:cs typeface="Times New Roman" pitchFamily="34" charset="-120"/>
               </a:rPr>
-              <a:t>3</a:t>
+              <a:t>4</a:t>
             </a:r>
             <a:endParaRPr lang="en-US" sz="1200" dirty="0"/>
           </a:p>
@@ -3417,14 +3177,15 @@
 </p:sld>
 </file>
 
-<file path=ppt/slides/slide4.xml><?xml version="1.0" encoding="utf-8"?>
+<file path=ppt/slides/slide5.xml><?xml version="1.0" encoding="utf-8"?>
 <p:sld xmlns:a="http://schemas.openxmlformats.org/drawingml/2006/main" xmlns:r="http://schemas.openxmlformats.org/officeDocument/2006/relationships" xmlns:p="http://schemas.openxmlformats.org/presentationml/2006/main">
-  <p:cSld name="Slide 4">
+  <p:cSld name="Slide 5">
     <p:bg>
       <p:bgPr>
         <a:solidFill>
           <a:srgbClr val="FFFFFF"/>
         </a:solidFill>
+        <a:effectLst/>
       </p:bgPr>
     </p:bg>
     <p:spTree>
@@ -3465,6 +3226,13 @@
             <a:prstDash val="solid"/>
           </a:ln>
         </p:spPr>
+        <p:txBody>
+          <a:bodyPr/>
+          <a:lstStyle/>
+          <a:p>
+            <a:endParaRPr lang="en-US"/>
+          </a:p>
+        </p:txBody>
       </p:sp>
       <p:sp>
         <p:nvSpPr>
@@ -3490,6 +3258,13 @@
             <a:prstDash val="solid"/>
           </a:ln>
         </p:spPr>
+        <p:txBody>
+          <a:bodyPr/>
+          <a:lstStyle/>
+          <a:p>
+            <a:endParaRPr lang="en-US"/>
+          </a:p>
+        </p:txBody>
       </p:sp>
       <p:sp>
         <p:nvSpPr>
@@ -3512,7 +3287,7 @@
           <a:bodyPr wrap="square" lIns="0" tIns="0" rIns="0" bIns="0" rtlCol="0" anchor="ctr"/>
           <a:lstStyle/>
           <a:p>
-            <a:pPr indent="0" marL="0">
+            <a:pPr marL="0" indent="0">
               <a:buNone/>
             </a:pPr>
             <a:r>
@@ -3551,7 +3326,7 @@
           <a:bodyPr wrap="square" lIns="0" tIns="0" rIns="0" bIns="0" rtlCol="0" anchor="ctr"/>
           <a:lstStyle/>
           <a:p>
-            <a:pPr algn="r" indent="0" marL="0">
+            <a:pPr marL="0" indent="0" algn="r">
               <a:buNone/>
             </a:pPr>
             <a:r>
@@ -3590,7 +3365,7 @@
           <a:bodyPr wrap="square" lIns="0" tIns="0" rIns="0" bIns="0" rtlCol="0" anchor="ctr"/>
           <a:lstStyle/>
           <a:p>
-            <a:pPr indent="0" marL="0">
+            <a:pPr marL="0" indent="0">
               <a:buNone/>
             </a:pPr>
             <a:r>
@@ -3602,7 +3377,7 @@
                 <a:ea typeface="Times New Roman" pitchFamily="34" charset="-122"/>
                 <a:cs typeface="Times New Roman" pitchFamily="34" charset="-120"/>
               </a:rPr>
-              <a:t>3. Where Security and Privacy Conflict</a:t>
+              <a:t>4. A Problem-Solving Framework for Balancing Both</a:t>
             </a:r>
             <a:endParaRPr lang="en-US" sz="2300" dirty="0"/>
           </a:p>
@@ -3629,7 +3404,7 @@
           <a:bodyPr wrap="square" lIns="50800" tIns="50800" rIns="50800" bIns="50800" rtlCol="0" anchor="t"/>
           <a:lstStyle/>
           <a:p>
-            <a:pPr indent="0" marL="0">
+            <a:pPr marL="0" indent="0">
               <a:buNone/>
             </a:pPr>
             <a:r>
@@ -3641,18 +3416,18 @@
                 <a:ea typeface="Times New Roman" pitchFamily="34" charset="-122"/>
                 <a:cs typeface="Times New Roman" pitchFamily="34" charset="-120"/>
               </a:rPr>
-              <a:t>Strong security monitoring often requires collecting more data - such as detailed logs and behavioural signals - which increases privacy exposure.</a:t>
+              <a:t>Identify the specific security risk and the specific privacy risk in the situation, rather than treating it as a vague trade-off.</a:t>
             </a:r>
             <a:endParaRPr lang="en-US" sz="1800" dirty="0"/>
           </a:p>
           <a:p>
-            <a:pPr indent="0" marL="0">
+            <a:pPr marL="0" indent="0">
               <a:buNone/>
             </a:pPr>
             <a:endParaRPr lang="en-US" sz="1800" dirty="0"/>
           </a:p>
           <a:p>
-            <a:pPr indent="0" marL="0">
+            <a:pPr marL="0" indent="0">
               <a:buNone/>
             </a:pPr>
             <a:r>
@@ -3664,18 +3439,18 @@
                 <a:ea typeface="Times New Roman" pitchFamily="34" charset="-122"/>
                 <a:cs typeface="Times New Roman" pitchFamily="34" charset="-120"/>
               </a:rPr>
-              <a:t>Anonymisation, which protects privacy, can remove information a security team needs to detect and investigate an attack.</a:t>
+              <a:t>Ask whether a technique exists that serves both goals at once, such as access control or encryption, before assuming a trade-off is necessary.</a:t>
             </a:r>
             <a:endParaRPr lang="en-US" sz="1800" dirty="0"/>
           </a:p>
           <a:p>
-            <a:pPr indent="0" marL="0">
+            <a:pPr marL="0" indent="0">
               <a:buNone/>
             </a:pPr>
             <a:endParaRPr lang="en-US" sz="1800" dirty="0"/>
           </a:p>
           <a:p>
-            <a:pPr indent="0" marL="0">
+            <a:pPr marL="0" indent="0">
               <a:buNone/>
             </a:pPr>
             <a:r>
@@ -3687,18 +3462,18 @@
                 <a:ea typeface="Times New Roman" pitchFamily="34" charset="-122"/>
                 <a:cs typeface="Times New Roman" pitchFamily="34" charset="-120"/>
               </a:rPr>
-              <a:t>Facial recognition for building security directly trades individual privacy for a security benefit, as seen in Lecture 15.</a:t>
+              <a:t>Where a genuine trade-off remains, apply the least privacy-invasive option that still achieves the required security outcome.</a:t>
             </a:r>
             <a:endParaRPr lang="en-US" sz="1800" dirty="0"/>
           </a:p>
           <a:p>
-            <a:pPr indent="0" marL="0">
+            <a:pPr marL="0" indent="0">
               <a:buNone/>
             </a:pPr>
             <a:endParaRPr lang="en-US" sz="1800" dirty="0"/>
           </a:p>
           <a:p>
-            <a:pPr indent="0" marL="0">
+            <a:pPr marL="0" indent="0">
               <a:buNone/>
             </a:pPr>
             <a:r>
@@ -3710,7 +3485,7 @@
                 <a:ea typeface="Times New Roman" pitchFamily="34" charset="-122"/>
                 <a:cs typeface="Times New Roman" pitchFamily="34" charset="-120"/>
               </a:rPr>
-              <a:t>Neither goal should be allowed to fully override the other without a deliberate, justified decision.</a:t>
+              <a:t>Document the decision and its reasoning, using the transparency and accountability practices from earlier in this unit.</a:t>
             </a:r>
             <a:endParaRPr lang="en-US" sz="1800" dirty="0"/>
           </a:p>
@@ -3737,7 +3512,7 @@
           <a:bodyPr wrap="square" lIns="0" tIns="0" rIns="0" bIns="0" rtlCol="0" anchor="ctr"/>
           <a:lstStyle/>
           <a:p>
-            <a:pPr algn="ctr" indent="0" marL="0">
+            <a:pPr marL="0" indent="0" algn="ctr">
               <a:buNone/>
             </a:pPr>
             <a:r>
@@ -3749,7 +3524,7 @@
                 <a:ea typeface="Times New Roman" pitchFamily="34" charset="-122"/>
                 <a:cs typeface="Times New Roman" pitchFamily="34" charset="-120"/>
               </a:rPr>
-              <a:t>4</a:t>
+              <a:t>5</a:t>
             </a:r>
             <a:endParaRPr lang="en-US" sz="1200" dirty="0"/>
           </a:p>
@@ -3763,14 +3538,15 @@
 </p:sld>
 </file>
 
-<file path=ppt/slides/slide5.xml><?xml version="1.0" encoding="utf-8"?>
+<file path=ppt/slides/slide6.xml><?xml version="1.0" encoding="utf-8"?>
 <p:sld xmlns:a="http://schemas.openxmlformats.org/drawingml/2006/main" xmlns:r="http://schemas.openxmlformats.org/officeDocument/2006/relationships" xmlns:p="http://schemas.openxmlformats.org/presentationml/2006/main">
-  <p:cSld name="Slide 5">
+  <p:cSld name="Slide 6">
     <p:bg>
       <p:bgPr>
         <a:solidFill>
           <a:srgbClr val="FFFFFF"/>
         </a:solidFill>
+        <a:effectLst/>
       </p:bgPr>
     </p:bg>
     <p:spTree>
@@ -3811,6 +3587,13 @@
             <a:prstDash val="solid"/>
           </a:ln>
         </p:spPr>
+        <p:txBody>
+          <a:bodyPr/>
+          <a:lstStyle/>
+          <a:p>
+            <a:endParaRPr lang="en-US"/>
+          </a:p>
+        </p:txBody>
       </p:sp>
       <p:sp>
         <p:nvSpPr>
@@ -3836,6 +3619,13 @@
             <a:prstDash val="solid"/>
           </a:ln>
         </p:spPr>
+        <p:txBody>
+          <a:bodyPr/>
+          <a:lstStyle/>
+          <a:p>
+            <a:endParaRPr lang="en-US"/>
+          </a:p>
+        </p:txBody>
       </p:sp>
       <p:sp>
         <p:nvSpPr>
@@ -3858,7 +3648,7 @@
           <a:bodyPr wrap="square" lIns="0" tIns="0" rIns="0" bIns="0" rtlCol="0" anchor="ctr"/>
           <a:lstStyle/>
           <a:p>
-            <a:pPr indent="0" marL="0">
+            <a:pPr marL="0" indent="0">
               <a:buNone/>
             </a:pPr>
             <a:r>
@@ -3897,7 +3687,7 @@
           <a:bodyPr wrap="square" lIns="0" tIns="0" rIns="0" bIns="0" rtlCol="0" anchor="ctr"/>
           <a:lstStyle/>
           <a:p>
-            <a:pPr algn="r" indent="0" marL="0">
+            <a:pPr marL="0" indent="0" algn="r">
               <a:buNone/>
             </a:pPr>
             <a:r>
@@ -3936,7 +3726,7 @@
           <a:bodyPr wrap="square" lIns="0" tIns="0" rIns="0" bIns="0" rtlCol="0" anchor="ctr"/>
           <a:lstStyle/>
           <a:p>
-            <a:pPr indent="0" marL="0">
+            <a:pPr marL="0" indent="0">
               <a:buNone/>
             </a:pPr>
             <a:r>
@@ -3948,7 +3738,7 @@
                 <a:ea typeface="Times New Roman" pitchFamily="34" charset="-122"/>
                 <a:cs typeface="Times New Roman" pitchFamily="34" charset="-120"/>
               </a:rPr>
-              <a:t>4. A Problem-Solving Framework for Balancing Both</a:t>
+              <a:t>5. Unit II Case Study - Setup</a:t>
             </a:r>
             <a:endParaRPr lang="en-US" sz="2300" dirty="0"/>
           </a:p>
@@ -3975,7 +3765,7 @@
           <a:bodyPr wrap="square" lIns="50800" tIns="50800" rIns="50800" bIns="50800" rtlCol="0" anchor="t"/>
           <a:lstStyle/>
           <a:p>
-            <a:pPr indent="0" marL="0">
+            <a:pPr marL="0" indent="0">
               <a:buNone/>
             </a:pPr>
             <a:r>
@@ -3987,18 +3777,18 @@
                 <a:ea typeface="Times New Roman" pitchFamily="34" charset="-122"/>
                 <a:cs typeface="Times New Roman" pitchFamily="34" charset="-120"/>
               </a:rPr>
-              <a:t>Identify the specific security risk and the specific privacy risk in the situation, rather than treating it as a vague trade-off.</a:t>
+              <a:t>A city proposes installing AI-powered cameras with facial recognition and behavioural monitoring in public transit stations to reduce crime.</a:t>
             </a:r>
             <a:endParaRPr lang="en-US" sz="1800" dirty="0"/>
           </a:p>
           <a:p>
-            <a:pPr indent="0" marL="0">
+            <a:pPr marL="0" indent="0">
               <a:buNone/>
             </a:pPr>
             <a:endParaRPr lang="en-US" sz="1800" dirty="0"/>
           </a:p>
           <a:p>
-            <a:pPr indent="0" marL="0">
+            <a:pPr marL="0" indent="0">
               <a:buNone/>
             </a:pPr>
             <a:r>
@@ -4010,18 +3800,18 @@
                 <a:ea typeface="Times New Roman" pitchFamily="34" charset="-122"/>
                 <a:cs typeface="Times New Roman" pitchFamily="34" charset="-120"/>
               </a:rPr>
-              <a:t>Ask whether a technique exists that serves both goals at once, such as access control or encryption, before assuming a trade-off is necessary.</a:t>
+              <a:t>The system would identify persons of interest, track unusual movement patterns, and retain footage for 90 days.</a:t>
             </a:r>
             <a:endParaRPr lang="en-US" sz="1800" dirty="0"/>
           </a:p>
           <a:p>
-            <a:pPr indent="0" marL="0">
+            <a:pPr marL="0" indent="0">
               <a:buNone/>
             </a:pPr>
             <a:endParaRPr lang="en-US" sz="1800" dirty="0"/>
           </a:p>
           <a:p>
-            <a:pPr indent="0" marL="0">
+            <a:pPr marL="0" indent="0">
               <a:buNone/>
             </a:pPr>
             <a:r>
@@ -4033,18 +3823,18 @@
                 <a:ea typeface="Times New Roman" pitchFamily="34" charset="-122"/>
                 <a:cs typeface="Times New Roman" pitchFamily="34" charset="-120"/>
               </a:rPr>
-              <a:t>Where a genuine trade-off remains, apply the least privacy-invasive option that still achieves the required security outcome.</a:t>
+              <a:t>Civil liberties groups raise concerns about surveillance, profiling and a lack of clear oversight.</a:t>
             </a:r>
             <a:endParaRPr lang="en-US" sz="1800" dirty="0"/>
           </a:p>
           <a:p>
-            <a:pPr indent="0" marL="0">
+            <a:pPr marL="0" indent="0">
               <a:buNone/>
             </a:pPr>
             <a:endParaRPr lang="en-US" sz="1800" dirty="0"/>
           </a:p>
           <a:p>
-            <a:pPr indent="0" marL="0">
+            <a:pPr marL="0" indent="0">
               <a:buNone/>
             </a:pPr>
             <a:r>
@@ -4056,7 +3846,7 @@
                 <a:ea typeface="Times New Roman" pitchFamily="34" charset="-122"/>
                 <a:cs typeface="Times New Roman" pitchFamily="34" charset="-120"/>
               </a:rPr>
-              <a:t>Document the decision and its reasoning, using the transparency and accountability practices from earlier in this unit.</a:t>
+              <a:t>The transit authority must decide how, or whether, to deploy the system responsibly.</a:t>
             </a:r>
             <a:endParaRPr lang="en-US" sz="1800" dirty="0"/>
           </a:p>
@@ -4083,7 +3873,7 @@
           <a:bodyPr wrap="square" lIns="0" tIns="0" rIns="0" bIns="0" rtlCol="0" anchor="ctr"/>
           <a:lstStyle/>
           <a:p>
-            <a:pPr algn="ctr" indent="0" marL="0">
+            <a:pPr marL="0" indent="0" algn="ctr">
               <a:buNone/>
             </a:pPr>
             <a:r>
@@ -4095,7 +3885,7 @@
                 <a:ea typeface="Times New Roman" pitchFamily="34" charset="-122"/>
                 <a:cs typeface="Times New Roman" pitchFamily="34" charset="-120"/>
               </a:rPr>
-              <a:t>5</a:t>
+              <a:t>6</a:t>
             </a:r>
             <a:endParaRPr lang="en-US" sz="1200" dirty="0"/>
           </a:p>
@@ -4109,14 +3899,15 @@
 </p:sld>
 </file>
 
-<file path=ppt/slides/slide6.xml><?xml version="1.0" encoding="utf-8"?>
+<file path=ppt/slides/slide7.xml><?xml version="1.0" encoding="utf-8"?>
 <p:sld xmlns:a="http://schemas.openxmlformats.org/drawingml/2006/main" xmlns:r="http://schemas.openxmlformats.org/officeDocument/2006/relationships" xmlns:p="http://schemas.openxmlformats.org/presentationml/2006/main">
-  <p:cSld name="Slide 6">
+  <p:cSld name="Slide 7">
     <p:bg>
       <p:bgPr>
         <a:solidFill>
           <a:srgbClr val="FFFFFF"/>
         </a:solidFill>
+        <a:effectLst/>
       </p:bgPr>
     </p:bg>
     <p:spTree>
@@ -4157,6 +3948,13 @@
             <a:prstDash val="solid"/>
           </a:ln>
         </p:spPr>
+        <p:txBody>
+          <a:bodyPr/>
+          <a:lstStyle/>
+          <a:p>
+            <a:endParaRPr lang="en-US"/>
+          </a:p>
+        </p:txBody>
       </p:sp>
       <p:sp>
         <p:nvSpPr>
@@ -4182,6 +3980,13 @@
             <a:prstDash val="solid"/>
           </a:ln>
         </p:spPr>
+        <p:txBody>
+          <a:bodyPr/>
+          <a:lstStyle/>
+          <a:p>
+            <a:endParaRPr lang="en-US"/>
+          </a:p>
+        </p:txBody>
       </p:sp>
       <p:sp>
         <p:nvSpPr>
@@ -4204,7 +4009,7 @@
           <a:bodyPr wrap="square" lIns="0" tIns="0" rIns="0" bIns="0" rtlCol="0" anchor="ctr"/>
           <a:lstStyle/>
           <a:p>
-            <a:pPr indent="0" marL="0">
+            <a:pPr marL="0" indent="0">
               <a:buNone/>
             </a:pPr>
             <a:r>
@@ -4243,7 +4048,7 @@
           <a:bodyPr wrap="square" lIns="0" tIns="0" rIns="0" bIns="0" rtlCol="0" anchor="ctr"/>
           <a:lstStyle/>
           <a:p>
-            <a:pPr algn="r" indent="0" marL="0">
+            <a:pPr marL="0" indent="0" algn="r">
               <a:buNone/>
             </a:pPr>
             <a:r>
@@ -4282,7 +4087,7 @@
           <a:bodyPr wrap="square" lIns="0" tIns="0" rIns="0" bIns="0" rtlCol="0" anchor="ctr"/>
           <a:lstStyle/>
           <a:p>
-            <a:pPr indent="0" marL="0">
+            <a:pPr marL="0" indent="0">
               <a:buNone/>
             </a:pPr>
             <a:r>
@@ -4294,7 +4099,7 @@
                 <a:ea typeface="Times New Roman" pitchFamily="34" charset="-122"/>
                 <a:cs typeface="Times New Roman" pitchFamily="34" charset="-120"/>
               </a:rPr>
-              <a:t>5. Unit II Case Study - Setup</a:t>
+              <a:t>6. Unit II Case Study - Applying the Concepts</a:t>
             </a:r>
             <a:endParaRPr lang="en-US" sz="2300" dirty="0"/>
           </a:p>
@@ -4321,7 +4126,7 @@
           <a:bodyPr wrap="square" lIns="50800" tIns="50800" rIns="50800" bIns="50800" rtlCol="0" anchor="t"/>
           <a:lstStyle/>
           <a:p>
-            <a:pPr indent="0" marL="0">
+            <a:pPr marL="0" indent="0">
               <a:buNone/>
             </a:pPr>
             <a:r>
@@ -4333,18 +4138,18 @@
                 <a:ea typeface="Times New Roman" pitchFamily="34" charset="-122"/>
                 <a:cs typeface="Times New Roman" pitchFamily="34" charset="-120"/>
               </a:rPr>
-              <a:t>A city proposes installing AI-powered cameras with facial recognition and behavioural monitoring in public transit stations to reduce crime.</a:t>
+              <a:t>Transparency (Lectures 11-12): the authority should publish a system card describing the technology's purpose, accuracy and limitations.</a:t>
             </a:r>
             <a:endParaRPr lang="en-US" sz="1800" dirty="0"/>
           </a:p>
           <a:p>
-            <a:pPr indent="0" marL="0">
+            <a:pPr marL="0" indent="0">
               <a:buNone/>
             </a:pPr>
             <a:endParaRPr lang="en-US" sz="1800" dirty="0"/>
           </a:p>
           <a:p>
-            <a:pPr indent="0" marL="0">
+            <a:pPr marL="0" indent="0">
               <a:buNone/>
             </a:pPr>
             <a:r>
@@ -4356,18 +4161,18 @@
                 <a:ea typeface="Times New Roman" pitchFamily="34" charset="-122"/>
                 <a:cs typeface="Times New Roman" pitchFamily="34" charset="-120"/>
               </a:rPr>
-              <a:t>The system would identify persons of interest, track unusual movement patterns, and retain footage for 90 days.</a:t>
+              <a:t>Accountability (Lectures 13-14): a named oversight body should review matches and handle escalations, not the system alone.</a:t>
             </a:r>
             <a:endParaRPr lang="en-US" sz="1800" dirty="0"/>
           </a:p>
           <a:p>
-            <a:pPr indent="0" marL="0">
+            <a:pPr marL="0" indent="0">
               <a:buNone/>
             </a:pPr>
             <a:endParaRPr lang="en-US" sz="1800" dirty="0"/>
           </a:p>
           <a:p>
-            <a:pPr indent="0" marL="0">
+            <a:pPr marL="0" indent="0">
               <a:buNone/>
             </a:pPr>
             <a:r>
@@ -4379,18 +4184,18 @@
                 <a:ea typeface="Times New Roman" pitchFamily="34" charset="-122"/>
                 <a:cs typeface="Times New Roman" pitchFamily="34" charset="-120"/>
               </a:rPr>
-              <a:t>Civil liberties groups raise concerns about surveillance, profiling and a lack of clear oversight.</a:t>
+              <a:t>Privacy (Lectures 16-17): footage should be minimised and anonymised wherever possible, with strict access control and a limited retention period.</a:t>
             </a:r>
             <a:endParaRPr lang="en-US" sz="1800" dirty="0"/>
           </a:p>
           <a:p>
-            <a:pPr indent="0" marL="0">
+            <a:pPr marL="0" indent="0">
               <a:buNone/>
             </a:pPr>
             <a:endParaRPr lang="en-US" sz="1800" dirty="0"/>
           </a:p>
           <a:p>
-            <a:pPr indent="0" marL="0">
+            <a:pPr marL="0" indent="0">
               <a:buNone/>
             </a:pPr>
             <a:r>
@@ -4402,7 +4207,7 @@
                 <a:ea typeface="Times New Roman" pitchFamily="34" charset="-122"/>
                 <a:cs typeface="Times New Roman" pitchFamily="34" charset="-120"/>
               </a:rPr>
-              <a:t>The transit authority must decide how, or whether, to deploy the system responsibly.</a:t>
+              <a:t>Balancing security and privacy: facial recognition could be restricted to a documented list of serious offences, not open-ended monitoring.</a:t>
             </a:r>
             <a:endParaRPr lang="en-US" sz="1800" dirty="0"/>
           </a:p>
@@ -4429,7 +4234,7 @@
           <a:bodyPr wrap="square" lIns="0" tIns="0" rIns="0" bIns="0" rtlCol="0" anchor="ctr"/>
           <a:lstStyle/>
           <a:p>
-            <a:pPr algn="ctr" indent="0" marL="0">
+            <a:pPr marL="0" indent="0" algn="ctr">
               <a:buNone/>
             </a:pPr>
             <a:r>
@@ -4441,7 +4246,7 @@
                 <a:ea typeface="Times New Roman" pitchFamily="34" charset="-122"/>
                 <a:cs typeface="Times New Roman" pitchFamily="34" charset="-120"/>
               </a:rPr>
-              <a:t>6</a:t>
+              <a:t>7</a:t>
             </a:r>
             <a:endParaRPr lang="en-US" sz="1200" dirty="0"/>
           </a:p>
@@ -4455,14 +4260,15 @@
 </p:sld>
 </file>
 
-<file path=ppt/slides/slide7.xml><?xml version="1.0" encoding="utf-8"?>
+<file path=ppt/slides/slide8.xml><?xml version="1.0" encoding="utf-8"?>
 <p:sld xmlns:a="http://schemas.openxmlformats.org/drawingml/2006/main" xmlns:r="http://schemas.openxmlformats.org/officeDocument/2006/relationships" xmlns:p="http://schemas.openxmlformats.org/presentationml/2006/main">
-  <p:cSld name="Slide 7">
+  <p:cSld name="Slide 8">
     <p:bg>
       <p:bgPr>
         <a:solidFill>
           <a:srgbClr val="FFFFFF"/>
         </a:solidFill>
+        <a:effectLst/>
       </p:bgPr>
     </p:bg>
     <p:spTree>
@@ -4503,6 +4309,13 @@
             <a:prstDash val="solid"/>
           </a:ln>
         </p:spPr>
+        <p:txBody>
+          <a:bodyPr/>
+          <a:lstStyle/>
+          <a:p>
+            <a:endParaRPr lang="en-US"/>
+          </a:p>
+        </p:txBody>
       </p:sp>
       <p:sp>
         <p:nvSpPr>
@@ -4528,6 +4341,13 @@
             <a:prstDash val="solid"/>
           </a:ln>
         </p:spPr>
+        <p:txBody>
+          <a:bodyPr/>
+          <a:lstStyle/>
+          <a:p>
+            <a:endParaRPr lang="en-US"/>
+          </a:p>
+        </p:txBody>
       </p:sp>
       <p:sp>
         <p:nvSpPr>
@@ -4550,7 +4370,7 @@
           <a:bodyPr wrap="square" lIns="0" tIns="0" rIns="0" bIns="0" rtlCol="0" anchor="ctr"/>
           <a:lstStyle/>
           <a:p>
-            <a:pPr indent="0" marL="0">
+            <a:pPr marL="0" indent="0">
               <a:buNone/>
             </a:pPr>
             <a:r>
@@ -4589,7 +4409,7 @@
           <a:bodyPr wrap="square" lIns="0" tIns="0" rIns="0" bIns="0" rtlCol="0" anchor="ctr"/>
           <a:lstStyle/>
           <a:p>
-            <a:pPr algn="r" indent="0" marL="0">
+            <a:pPr marL="0" indent="0" algn="r">
               <a:buNone/>
             </a:pPr>
             <a:r>
@@ -4628,353 +4448,7 @@
           <a:bodyPr wrap="square" lIns="0" tIns="0" rIns="0" bIns="0" rtlCol="0" anchor="ctr"/>
           <a:lstStyle/>
           <a:p>
-            <a:pPr indent="0" marL="0">
-              <a:buNone/>
-            </a:pPr>
-            <a:r>
-              <a:rPr lang="en-US" sz="2300" b="1" dirty="0">
-                <a:solidFill>
-                  <a:srgbClr val="1F4E79"/>
-                </a:solidFill>
-                <a:latin typeface="Times New Roman" pitchFamily="34" charset="0"/>
-                <a:ea typeface="Times New Roman" pitchFamily="34" charset="-122"/>
-                <a:cs typeface="Times New Roman" pitchFamily="34" charset="-120"/>
-              </a:rPr>
-              <a:t>6. Unit II Case Study - Applying the Concepts</a:t>
-            </a:r>
-            <a:endParaRPr lang="en-US" sz="2300" dirty="0"/>
-          </a:p>
-        </p:txBody>
-      </p:sp>
-      <p:sp>
-        <p:nvSpPr>
-          <p:cNvPr id="7" name="Text 5"/>
-          <p:cNvSpPr/>
-          <p:nvPr/>
-        </p:nvSpPr>
-        <p:spPr>
-          <a:xfrm>
-            <a:off x="594360" y="1417320"/>
-            <a:ext cx="10972800" cy="4846320"/>
-          </a:xfrm>
-          <a:prstGeom prst="rect">
-            <a:avLst/>
-          </a:prstGeom>
-          <a:noFill/>
-          <a:ln/>
-        </p:spPr>
-        <p:txBody>
-          <a:bodyPr wrap="square" lIns="50800" tIns="50800" rIns="50800" bIns="50800" rtlCol="0" anchor="t"/>
-          <a:lstStyle/>
-          <a:p>
-            <a:pPr indent="0" marL="0">
-              <a:buNone/>
-            </a:pPr>
-            <a:r>
-              <a:rPr lang="en-US" sz="1800" dirty="0">
-                <a:solidFill>
-                  <a:srgbClr val="191919"/>
-                </a:solidFill>
-                <a:latin typeface="Times New Roman" pitchFamily="34" charset="0"/>
-                <a:ea typeface="Times New Roman" pitchFamily="34" charset="-122"/>
-                <a:cs typeface="Times New Roman" pitchFamily="34" charset="-120"/>
-              </a:rPr>
-              <a:t>Transparency (Lectures 11-12): the authority should publish a system card describing the technology's purpose, accuracy and limitations.</a:t>
-            </a:r>
-            <a:endParaRPr lang="en-US" sz="1800" dirty="0"/>
-          </a:p>
-          <a:p>
-            <a:pPr indent="0" marL="0">
-              <a:buNone/>
-            </a:pPr>
-            <a:endParaRPr lang="en-US" sz="1800" dirty="0"/>
-          </a:p>
-          <a:p>
-            <a:pPr indent="0" marL="0">
-              <a:buNone/>
-            </a:pPr>
-            <a:r>
-              <a:rPr lang="en-US" sz="1800" dirty="0">
-                <a:solidFill>
-                  <a:srgbClr val="191919"/>
-                </a:solidFill>
-                <a:latin typeface="Times New Roman" pitchFamily="34" charset="0"/>
-                <a:ea typeface="Times New Roman" pitchFamily="34" charset="-122"/>
-                <a:cs typeface="Times New Roman" pitchFamily="34" charset="-120"/>
-              </a:rPr>
-              <a:t>Accountability (Lectures 13-14): a named oversight body should review matches and handle escalations, not the system alone.</a:t>
-            </a:r>
-            <a:endParaRPr lang="en-US" sz="1800" dirty="0"/>
-          </a:p>
-          <a:p>
-            <a:pPr indent="0" marL="0">
-              <a:buNone/>
-            </a:pPr>
-            <a:endParaRPr lang="en-US" sz="1800" dirty="0"/>
-          </a:p>
-          <a:p>
-            <a:pPr indent="0" marL="0">
-              <a:buNone/>
-            </a:pPr>
-            <a:r>
-              <a:rPr lang="en-US" sz="1800" dirty="0">
-                <a:solidFill>
-                  <a:srgbClr val="191919"/>
-                </a:solidFill>
-                <a:latin typeface="Times New Roman" pitchFamily="34" charset="0"/>
-                <a:ea typeface="Times New Roman" pitchFamily="34" charset="-122"/>
-                <a:cs typeface="Times New Roman" pitchFamily="34" charset="-120"/>
-              </a:rPr>
-              <a:t>Privacy (Lectures 16-17): footage should be minimised and anonymised wherever possible, with strict access control and a limited retention period.</a:t>
-            </a:r>
-            <a:endParaRPr lang="en-US" sz="1800" dirty="0"/>
-          </a:p>
-          <a:p>
-            <a:pPr indent="0" marL="0">
-              <a:buNone/>
-            </a:pPr>
-            <a:endParaRPr lang="en-US" sz="1800" dirty="0"/>
-          </a:p>
-          <a:p>
-            <a:pPr indent="0" marL="0">
-              <a:buNone/>
-            </a:pPr>
-            <a:r>
-              <a:rPr lang="en-US" sz="1800" dirty="0">
-                <a:solidFill>
-                  <a:srgbClr val="191919"/>
-                </a:solidFill>
-                <a:latin typeface="Times New Roman" pitchFamily="34" charset="0"/>
-                <a:ea typeface="Times New Roman" pitchFamily="34" charset="-122"/>
-                <a:cs typeface="Times New Roman" pitchFamily="34" charset="-120"/>
-              </a:rPr>
-              <a:t>Balancing security and privacy: facial recognition could be restricted to a documented list of serious offences, not open-ended monitoring.</a:t>
-            </a:r>
-            <a:endParaRPr lang="en-US" sz="1800" dirty="0"/>
-          </a:p>
-        </p:txBody>
-      </p:sp>
-      <p:sp>
-        <p:nvSpPr>
-          <p:cNvPr id="8" name="Text 6"/>
-          <p:cNvSpPr/>
-          <p:nvPr/>
-        </p:nvSpPr>
-        <p:spPr>
-          <a:xfrm>
-            <a:off x="11430000" y="6446520"/>
-            <a:ext cx="365760" cy="182880"/>
-          </a:xfrm>
-          <a:prstGeom prst="rect">
-            <a:avLst/>
-          </a:prstGeom>
-          <a:noFill/>
-          <a:ln/>
-        </p:spPr>
-        <p:txBody>
-          <a:bodyPr wrap="square" lIns="0" tIns="0" rIns="0" bIns="0" rtlCol="0" anchor="ctr"/>
-          <a:lstStyle/>
-          <a:p>
-            <a:pPr algn="ctr" indent="0" marL="0">
-              <a:buNone/>
-            </a:pPr>
-            <a:r>
-              <a:rPr lang="en-US" sz="1200" dirty="0">
-                <a:solidFill>
-                  <a:srgbClr val="595959"/>
-                </a:solidFill>
-                <a:latin typeface="Times New Roman" pitchFamily="34" charset="0"/>
-                <a:ea typeface="Times New Roman" pitchFamily="34" charset="-122"/>
-                <a:cs typeface="Times New Roman" pitchFamily="34" charset="-120"/>
-              </a:rPr>
-              <a:t>7</a:t>
-            </a:r>
-            <a:endParaRPr lang="en-US" sz="1200" dirty="0"/>
-          </a:p>
-        </p:txBody>
-      </p:sp>
-    </p:spTree>
-  </p:cSld>
-  <p:clrMapOvr>
-    <a:masterClrMapping/>
-  </p:clrMapOvr>
-</p:sld>
-</file>
-
-<file path=ppt/slides/slide8.xml><?xml version="1.0" encoding="utf-8"?>
-<p:sld xmlns:a="http://schemas.openxmlformats.org/drawingml/2006/main" xmlns:r="http://schemas.openxmlformats.org/officeDocument/2006/relationships" xmlns:p="http://schemas.openxmlformats.org/presentationml/2006/main">
-  <p:cSld name="Slide 8">
-    <p:bg>
-      <p:bgPr>
-        <a:solidFill>
-          <a:srgbClr val="FFFFFF"/>
-        </a:solidFill>
-      </p:bgPr>
-    </p:bg>
-    <p:spTree>
-      <p:nvGrpSpPr>
-        <p:cNvPr id="1" name=""/>
-        <p:cNvGrpSpPr/>
-        <p:nvPr/>
-      </p:nvGrpSpPr>
-      <p:grpSpPr>
-        <a:xfrm>
-          <a:off x="0" y="0"/>
-          <a:ext cx="0" cy="0"/>
-          <a:chOff x="0" y="0"/>
-          <a:chExt cx="0" cy="0"/>
-        </a:xfrm>
-      </p:grpSpPr>
-      <p:sp>
-        <p:nvSpPr>
-          <p:cNvPr id="2" name="Shape 0"/>
-          <p:cNvSpPr/>
-          <p:nvPr/>
-        </p:nvSpPr>
-        <p:spPr>
-          <a:xfrm>
-            <a:off x="0" y="0"/>
-            <a:ext cx="12191695" cy="502920"/>
-          </a:xfrm>
-          <a:prstGeom prst="rect">
-            <a:avLst/>
-          </a:prstGeom>
-          <a:solidFill>
-            <a:srgbClr val="F8FBFF"/>
-          </a:solidFill>
-          <a:ln w="12700">
-            <a:solidFill>
-              <a:srgbClr val="F8FBFF"/>
-            </a:solidFill>
-            <a:prstDash val="solid"/>
-          </a:ln>
-        </p:spPr>
-      </p:sp>
-      <p:sp>
-        <p:nvSpPr>
-          <p:cNvPr id="3" name="Shape 1"/>
-          <p:cNvSpPr/>
-          <p:nvPr/>
-        </p:nvSpPr>
-        <p:spPr>
-          <a:xfrm>
-            <a:off x="0" y="475488"/>
-            <a:ext cx="12191695" cy="27432"/>
-          </a:xfrm>
-          <a:prstGeom prst="rect">
-            <a:avLst/>
-          </a:prstGeom>
-          <a:solidFill>
-            <a:srgbClr val="2E75B6"/>
-          </a:solidFill>
-          <a:ln w="12700">
-            <a:solidFill>
-              <a:srgbClr val="2E75B6"/>
-            </a:solidFill>
-            <a:prstDash val="solid"/>
-          </a:ln>
-        </p:spPr>
-      </p:sp>
-      <p:sp>
-        <p:nvSpPr>
-          <p:cNvPr id="4" name="Text 2"/>
-          <p:cNvSpPr/>
-          <p:nvPr/>
-        </p:nvSpPr>
-        <p:spPr>
-          <a:xfrm>
-            <a:off x="365760" y="73152"/>
-            <a:ext cx="6400800" cy="274320"/>
-          </a:xfrm>
-          <a:prstGeom prst="rect">
-            <a:avLst/>
-          </a:prstGeom>
-          <a:noFill/>
-          <a:ln/>
-        </p:spPr>
-        <p:txBody>
-          <a:bodyPr wrap="square" lIns="0" tIns="0" rIns="0" bIns="0" rtlCol="0" anchor="ctr"/>
-          <a:lstStyle/>
-          <a:p>
-            <a:pPr indent="0" marL="0">
-              <a:buNone/>
-            </a:pPr>
-            <a:r>
-              <a:rPr lang="en-US" sz="1800" b="1" dirty="0">
-                <a:solidFill>
-                  <a:srgbClr val="1F4E79"/>
-                </a:solidFill>
-                <a:latin typeface="Times New Roman" pitchFamily="34" charset="0"/>
-                <a:ea typeface="Times New Roman" pitchFamily="34" charset="-122"/>
-                <a:cs typeface="Times New Roman" pitchFamily="34" charset="-120"/>
-              </a:rPr>
-              <a:t>TCS349: Responsible and Explainable AI</a:t>
-            </a:r>
-            <a:endParaRPr lang="en-US" sz="1800" dirty="0"/>
-          </a:p>
-        </p:txBody>
-      </p:sp>
-      <p:sp>
-        <p:nvSpPr>
-          <p:cNvPr id="5" name="Text 3"/>
-          <p:cNvSpPr/>
-          <p:nvPr/>
-        </p:nvSpPr>
-        <p:spPr>
-          <a:xfrm>
-            <a:off x="8321040" y="82296"/>
-            <a:ext cx="3383280" cy="274320"/>
-          </a:xfrm>
-          <a:prstGeom prst="rect">
-            <a:avLst/>
-          </a:prstGeom>
-          <a:noFill/>
-          <a:ln/>
-        </p:spPr>
-        <p:txBody>
-          <a:bodyPr wrap="square" lIns="0" tIns="0" rIns="0" bIns="0" rtlCol="0" anchor="ctr"/>
-          <a:lstStyle/>
-          <a:p>
-            <a:pPr algn="r" indent="0" marL="0">
-              <a:buNone/>
-            </a:pPr>
-            <a:r>
-              <a:rPr lang="en-US" sz="1600" b="1" dirty="0">
-                <a:solidFill>
-                  <a:srgbClr val="1F4E79"/>
-                </a:solidFill>
-                <a:latin typeface="Times New Roman" pitchFamily="34" charset="0"/>
-                <a:ea typeface="Times New Roman" pitchFamily="34" charset="-122"/>
-                <a:cs typeface="Times New Roman" pitchFamily="34" charset="-120"/>
-              </a:rPr>
-              <a:t>Unit 2 | Lecture 9</a:t>
-            </a:r>
-            <a:endParaRPr lang="en-US" sz="1600" dirty="0"/>
-          </a:p>
-        </p:txBody>
-      </p:sp>
-      <p:sp>
-        <p:nvSpPr>
-          <p:cNvPr id="6" name="Text 4"/>
-          <p:cNvSpPr/>
-          <p:nvPr/>
-        </p:nvSpPr>
-        <p:spPr>
-          <a:xfrm>
-            <a:off x="502920" y="640080"/>
-            <a:ext cx="11155680" cy="640080"/>
-          </a:xfrm>
-          <a:prstGeom prst="rect">
-            <a:avLst/>
-          </a:prstGeom>
-          <a:noFill/>
-          <a:ln/>
-        </p:spPr>
-        <p:txBody>
-          <a:bodyPr wrap="square" lIns="0" tIns="0" rIns="0" bIns="0" rtlCol="0" anchor="ctr"/>
-          <a:lstStyle/>
-          <a:p>
-            <a:pPr indent="0" marL="0">
+            <a:pPr marL="0" indent="0">
               <a:buNone/>
             </a:pPr>
             <a:r>
@@ -5015,8 +4489,20 @@
             <a:tbl>
               <a:tblPr/>
               <a:tblGrid>
-                <a:gridCol w="5715000"/>
-                <a:gridCol w="5715000"/>
+                <a:gridCol w="5715000">
+                  <a:extLst>
+                    <a:ext uri="{9D8B030D-6E8A-4147-A177-3AD203B41FA5}">
+                      <a16:colId xmlns:a16="http://schemas.microsoft.com/office/drawing/2014/main" val="20000"/>
+                    </a:ext>
+                  </a:extLst>
+                </a:gridCol>
+                <a:gridCol w="5715000">
+                  <a:extLst>
+                    <a:ext uri="{9D8B030D-6E8A-4147-A177-3AD203B41FA5}">
+                      <a16:colId xmlns:a16="http://schemas.microsoft.com/office/drawing/2014/main" val="20001"/>
+                    </a:ext>
+                  </a:extLst>
+                </a:gridCol>
               </a:tblGrid>
               <a:tr h="1005840">
                 <a:tc>
@@ -5024,7 +4510,7 @@
                     <a:bodyPr/>
                     <a:lstStyle/>
                     <a:p>
-                      <a:pPr algn="ctr" indent="0" marL="0">
+                      <a:pPr marL="0" indent="0" algn="ctr">
                         <a:buNone/>
                       </a:pPr>
                       <a:r>
@@ -5045,7 +4531,7 @@
                       </a:endParaRPr>
                     </a:p>
                   </a:txBody>
-                  <a:tcPr marL="91440" marR="91440" marT="45720" marB="45720" anchor="ctr">
+                  <a:tcPr anchor="ctr">
                     <a:lnL w="25400" cap="flat" cmpd="sng" algn="ctr">
                       <a:solidFill>
                         <a:srgbClr val="FFFFFF"/>
@@ -5092,7 +4578,7 @@
                     <a:bodyPr/>
                     <a:lstStyle/>
                     <a:p>
-                      <a:pPr algn="ctr" indent="0" marL="0">
+                      <a:pPr marL="0" indent="0" algn="ctr">
                         <a:buNone/>
                       </a:pPr>
                       <a:r>
@@ -5113,7 +4599,7 @@
                       </a:endParaRPr>
                     </a:p>
                   </a:txBody>
-                  <a:tcPr marL="91440" marR="91440" marT="45720" marB="45720" anchor="ctr">
+                  <a:tcPr anchor="ctr">
                     <a:lnL w="25400" cap="flat" cmpd="sng" algn="ctr">
                       <a:solidFill>
                         <a:srgbClr val="FFFFFF"/>
@@ -5155,6 +4641,11 @@
                     </a:solidFill>
                   </a:tcPr>
                 </a:tc>
+                <a:extLst>
+                  <a:ext uri="{0D108BD9-81ED-4DB2-BD59-A6C34878D82A}">
+                    <a16:rowId xmlns:a16="http://schemas.microsoft.com/office/drawing/2014/main" val="10000"/>
+                  </a:ext>
+                </a:extLst>
               </a:tr>
               <a:tr h="1005840">
                 <a:tc>
@@ -5162,7 +4653,7 @@
                     <a:bodyPr/>
                     <a:lstStyle/>
                     <a:p>
-                      <a:pPr algn="l" indent="0" marL="0">
+                      <a:pPr marL="0" indent="0" algn="l">
                         <a:buNone/>
                       </a:pPr>
                       <a:r>
@@ -5183,7 +4674,7 @@
                       </a:endParaRPr>
                     </a:p>
                   </a:txBody>
-                  <a:tcPr marL="91440" marR="91440" marT="45720" marB="45720" anchor="t">
+                  <a:tcPr>
                     <a:lnL w="25400" cap="flat" cmpd="sng" algn="ctr">
                       <a:solidFill>
                         <a:srgbClr val="FFFFFF"/>
@@ -5230,7 +4721,7 @@
                     <a:bodyPr/>
                     <a:lstStyle/>
                     <a:p>
-                      <a:pPr algn="l" indent="0" marL="0">
+                      <a:pPr marL="0" indent="0" algn="l">
                         <a:buNone/>
                       </a:pPr>
                       <a:r>
@@ -5251,7 +4742,7 @@
                       </a:endParaRPr>
                     </a:p>
                   </a:txBody>
-                  <a:tcPr marL="91440" marR="91440" marT="45720" marB="45720" anchor="t">
+                  <a:tcPr>
                     <a:lnL w="25400" cap="flat" cmpd="sng" algn="ctr">
                       <a:solidFill>
                         <a:srgbClr val="FFFFFF"/>
@@ -5293,6 +4784,11 @@
                     </a:solidFill>
                   </a:tcPr>
                 </a:tc>
+                <a:extLst>
+                  <a:ext uri="{0D108BD9-81ED-4DB2-BD59-A6C34878D82A}">
+                    <a16:rowId xmlns:a16="http://schemas.microsoft.com/office/drawing/2014/main" val="10001"/>
+                  </a:ext>
+                </a:extLst>
               </a:tr>
               <a:tr h="1005840">
                 <a:tc>
@@ -5300,7 +4796,7 @@
                     <a:bodyPr/>
                     <a:lstStyle/>
                     <a:p>
-                      <a:pPr algn="l" indent="0" marL="0">
+                      <a:pPr marL="0" indent="0" algn="l">
                         <a:buNone/>
                       </a:pPr>
                       <a:r>
@@ -5321,7 +4817,7 @@
                       </a:endParaRPr>
                     </a:p>
                   </a:txBody>
-                  <a:tcPr marL="91440" marR="91440" marT="45720" marB="45720" anchor="t">
+                  <a:tcPr>
                     <a:lnL w="25400" cap="flat" cmpd="sng" algn="ctr">
                       <a:solidFill>
                         <a:srgbClr val="FFFFFF"/>
@@ -5368,7 +4864,7 @@
                     <a:bodyPr/>
                     <a:lstStyle/>
                     <a:p>
-                      <a:pPr algn="l" indent="0" marL="0">
+                      <a:pPr marL="0" indent="0" algn="l">
                         <a:buNone/>
                       </a:pPr>
                       <a:r>
@@ -5389,7 +4885,7 @@
                       </a:endParaRPr>
                     </a:p>
                   </a:txBody>
-                  <a:tcPr marL="91440" marR="91440" marT="45720" marB="45720" anchor="t">
+                  <a:tcPr>
                     <a:lnL w="25400" cap="flat" cmpd="sng" algn="ctr">
                       <a:solidFill>
                         <a:srgbClr val="FFFFFF"/>
@@ -5431,6 +4927,11 @@
                     </a:solidFill>
                   </a:tcPr>
                 </a:tc>
+                <a:extLst>
+                  <a:ext uri="{0D108BD9-81ED-4DB2-BD59-A6C34878D82A}">
+                    <a16:rowId xmlns:a16="http://schemas.microsoft.com/office/drawing/2014/main" val="10002"/>
+                  </a:ext>
+                </a:extLst>
               </a:tr>
               <a:tr h="1005840">
                 <a:tc>
@@ -5438,7 +4939,7 @@
                     <a:bodyPr/>
                     <a:lstStyle/>
                     <a:p>
-                      <a:pPr algn="l" indent="0" marL="0">
+                      <a:pPr marL="0" indent="0" algn="l">
                         <a:buNone/>
                       </a:pPr>
                       <a:r>
@@ -5459,7 +4960,7 @@
                       </a:endParaRPr>
                     </a:p>
                   </a:txBody>
-                  <a:tcPr marL="91440" marR="91440" marT="45720" marB="45720" anchor="t">
+                  <a:tcPr>
                     <a:lnL w="25400" cap="flat" cmpd="sng" algn="ctr">
                       <a:solidFill>
                         <a:srgbClr val="FFFFFF"/>
@@ -5506,7 +5007,7 @@
                     <a:bodyPr/>
                     <a:lstStyle/>
                     <a:p>
-                      <a:pPr algn="l" indent="0" marL="0">
+                      <a:pPr marL="0" indent="0" algn="l">
                         <a:buNone/>
                       </a:pPr>
                       <a:r>
@@ -5527,7 +5028,7 @@
                       </a:endParaRPr>
                     </a:p>
                   </a:txBody>
-                  <a:tcPr marL="91440" marR="91440" marT="45720" marB="45720" anchor="t">
+                  <a:tcPr>
                     <a:lnL w="25400" cap="flat" cmpd="sng" algn="ctr">
                       <a:solidFill>
                         <a:srgbClr val="FFFFFF"/>
@@ -5569,6 +5070,11 @@
                     </a:solidFill>
                   </a:tcPr>
                 </a:tc>
+                <a:extLst>
+                  <a:ext uri="{0D108BD9-81ED-4DB2-BD59-A6C34878D82A}">
+                    <a16:rowId xmlns:a16="http://schemas.microsoft.com/office/drawing/2014/main" val="10003"/>
+                  </a:ext>
+                </a:extLst>
               </a:tr>
             </a:tbl>
           </a:graphicData>
@@ -5595,7 +5101,7 @@
           <a:bodyPr wrap="square" lIns="0" tIns="0" rIns="0" bIns="0" rtlCol="0" anchor="ctr"/>
           <a:lstStyle/>
           <a:p>
-            <a:pPr algn="ctr" indent="0" marL="0">
+            <a:pPr marL="0" indent="0" algn="ctr">
               <a:buNone/>
             </a:pPr>
             <a:r>
@@ -5629,6 +5135,7 @@
         <a:solidFill>
           <a:srgbClr val="FFFFFF"/>
         </a:solidFill>
+        <a:effectLst/>
       </p:bgPr>
     </p:bg>
     <p:spTree>
@@ -5669,6 +5176,13 @@
             <a:prstDash val="solid"/>
           </a:ln>
         </p:spPr>
+        <p:txBody>
+          <a:bodyPr/>
+          <a:lstStyle/>
+          <a:p>
+            <a:endParaRPr lang="en-US"/>
+          </a:p>
+        </p:txBody>
       </p:sp>
       <p:sp>
         <p:nvSpPr>
@@ -5694,6 +5208,13 @@
             <a:prstDash val="solid"/>
           </a:ln>
         </p:spPr>
+        <p:txBody>
+          <a:bodyPr/>
+          <a:lstStyle/>
+          <a:p>
+            <a:endParaRPr lang="en-US"/>
+          </a:p>
+        </p:txBody>
       </p:sp>
       <p:sp>
         <p:nvSpPr>
@@ -5716,7 +5237,7 @@
           <a:bodyPr wrap="square" lIns="0" tIns="0" rIns="0" bIns="0" rtlCol="0" anchor="ctr"/>
           <a:lstStyle/>
           <a:p>
-            <a:pPr indent="0" marL="0">
+            <a:pPr marL="0" indent="0">
               <a:buNone/>
             </a:pPr>
             <a:r>
@@ -5755,7 +5276,7 @@
           <a:bodyPr wrap="square" lIns="0" tIns="0" rIns="0" bIns="0" rtlCol="0" anchor="ctr"/>
           <a:lstStyle/>
           <a:p>
-            <a:pPr algn="r" indent="0" marL="0">
+            <a:pPr marL="0" indent="0" algn="r">
               <a:buNone/>
             </a:pPr>
             <a:r>
@@ -5794,7 +5315,7 @@
           <a:bodyPr wrap="square" lIns="0" tIns="0" rIns="0" bIns="0" rtlCol="0" anchor="ctr"/>
           <a:lstStyle/>
           <a:p>
-            <a:pPr indent="0" marL="0">
+            <a:pPr marL="0" indent="0">
               <a:buNone/>
             </a:pPr>
             <a:r>
@@ -5833,7 +5354,7 @@
           <a:bodyPr wrap="square" lIns="50800" tIns="50800" rIns="50800" bIns="50800" rtlCol="0" anchor="t"/>
           <a:lstStyle/>
           <a:p>
-            <a:pPr indent="0" marL="0">
+            <a:pPr marL="0" indent="0">
               <a:buNone/>
             </a:pPr>
             <a:r>
@@ -5850,13 +5371,13 @@
             <a:endParaRPr lang="en-US" sz="1800" dirty="0"/>
           </a:p>
           <a:p>
-            <a:pPr indent="0" marL="0">
+            <a:pPr marL="0" indent="0">
               <a:buNone/>
             </a:pPr>
             <a:endParaRPr lang="en-US" sz="1800" dirty="0"/>
           </a:p>
           <a:p>
-            <a:pPr indent="0" marL="0">
+            <a:pPr marL="0" indent="0">
               <a:buNone/>
             </a:pPr>
             <a:r>
@@ -5873,13 +5394,13 @@
             <a:endParaRPr lang="en-US" sz="1800" dirty="0"/>
           </a:p>
           <a:p>
-            <a:pPr indent="0" marL="0">
+            <a:pPr marL="0" indent="0">
               <a:buNone/>
             </a:pPr>
             <a:endParaRPr lang="en-US" sz="1800" dirty="0"/>
           </a:p>
           <a:p>
-            <a:pPr indent="0" marL="0">
+            <a:pPr marL="0" indent="0">
               <a:buNone/>
             </a:pPr>
             <a:r>
@@ -5896,13 +5417,13 @@
             <a:endParaRPr lang="en-US" sz="1800" dirty="0"/>
           </a:p>
           <a:p>
-            <a:pPr indent="0" marL="0">
+            <a:pPr marL="0" indent="0">
               <a:buNone/>
             </a:pPr>
             <a:endParaRPr lang="en-US" sz="1800" dirty="0"/>
           </a:p>
           <a:p>
-            <a:pPr indent="0" marL="0">
+            <a:pPr marL="0" indent="0">
               <a:buNone/>
             </a:pPr>
             <a:r>
@@ -5941,7 +5462,7 @@
           <a:bodyPr wrap="square" lIns="0" tIns="0" rIns="0" bIns="0" rtlCol="0" anchor="ctr"/>
           <a:lstStyle/>
           <a:p>
-            <a:pPr algn="ctr" indent="0" marL="0">
+            <a:pPr marL="0" indent="0" algn="ctr">
               <a:buNone/>
             </a:pPr>
             <a:r>
@@ -6260,4 +5781,319 @@
     </a:ext>
   </a:extLst>
 </a:theme>
+</file>
+
+<file path=ppt/theme/theme2.xml><?xml version="1.0" encoding="utf-8"?>
+<a:theme xmlns:a="http://schemas.openxmlformats.org/drawingml/2006/main" name="Office Theme">
+  <a:themeElements>
+    <a:clrScheme name="Office">
+      <a:dk1>
+        <a:sysClr val="windowText" lastClr="000000"/>
+      </a:dk1>
+      <a:lt1>
+        <a:sysClr val="window" lastClr="FFFFFF"/>
+      </a:lt1>
+      <a:dk2>
+        <a:srgbClr val="0E2841"/>
+      </a:dk2>
+      <a:lt2>
+        <a:srgbClr val="E8E8E8"/>
+      </a:lt2>
+      <a:accent1>
+        <a:srgbClr val="156082"/>
+      </a:accent1>
+      <a:accent2>
+        <a:srgbClr val="E97132"/>
+      </a:accent2>
+      <a:accent3>
+        <a:srgbClr val="196B24"/>
+      </a:accent3>
+      <a:accent4>
+        <a:srgbClr val="0F9ED5"/>
+      </a:accent4>
+      <a:accent5>
+        <a:srgbClr val="A02B93"/>
+      </a:accent5>
+      <a:accent6>
+        <a:srgbClr val="4EA72E"/>
+      </a:accent6>
+      <a:hlink>
+        <a:srgbClr val="467886"/>
+      </a:hlink>
+      <a:folHlink>
+        <a:srgbClr val="96607D"/>
+      </a:folHlink>
+    </a:clrScheme>
+    <a:fontScheme name="Office">
+      <a:majorFont>
+        <a:latin typeface="Aptos Display" panose="02110004020202020204"/>
+        <a:ea typeface=""/>
+        <a:cs typeface=""/>
+        <a:font script="Jpan" typeface="游ゴシック Light"/>
+        <a:font script="Hang" typeface="맑은 고딕"/>
+        <a:font script="Hans" typeface="等线 Light"/>
+        <a:font script="Hant" typeface="新細明體"/>
+        <a:font script="Arab" typeface="Times New Roman"/>
+        <a:font script="Hebr" typeface="Times New Roman"/>
+        <a:font script="Thai" typeface="Angsana New"/>
+        <a:font script="Ethi" typeface="Nyala"/>
+        <a:font script="Beng" typeface="Vrinda"/>
+        <a:font script="Gujr" typeface="Shruti"/>
+        <a:font script="Khmr" typeface="MoolBoran"/>
+        <a:font script="Knda" typeface="Tunga"/>
+        <a:font script="Guru" typeface="Raavi"/>
+        <a:font script="Cans" typeface="Euphemia"/>
+        <a:font script="Cher" typeface="Plantagenet Cherokee"/>
+        <a:font script="Yiii" typeface="Microsoft Yi Baiti"/>
+        <a:font script="Tibt" typeface="Microsoft Himalaya"/>
+        <a:font script="Thaa" typeface="MV Boli"/>
+        <a:font script="Deva" typeface="Mangal"/>
+        <a:font script="Telu" typeface="Gautami"/>
+        <a:font script="Taml" typeface="Latha"/>
+        <a:font script="Syrc" typeface="Estrangelo Edessa"/>
+        <a:font script="Orya" typeface="Kalinga"/>
+        <a:font script="Mlym" typeface="Kartika"/>
+        <a:font script="Laoo" typeface="DokChampa"/>
+        <a:font script="Sinh" typeface="Iskoola Pota"/>
+        <a:font script="Mong" typeface="Mongolian Baiti"/>
+        <a:font script="Viet" typeface="Times New Roman"/>
+        <a:font script="Uigh" typeface="Microsoft Uighur"/>
+        <a:font script="Geor" typeface="Sylfaen"/>
+        <a:font script="Armn" typeface="Arial"/>
+        <a:font script="Bugi" typeface="Leelawadee UI"/>
+        <a:font script="Bopo" typeface="Microsoft JhengHei"/>
+        <a:font script="Java" typeface="Javanese Text"/>
+        <a:font script="Lisu" typeface="Segoe UI"/>
+        <a:font script="Mymr" typeface="Myanmar Text"/>
+        <a:font script="Nkoo" typeface="Ebrima"/>
+        <a:font script="Olck" typeface="Nirmala UI"/>
+        <a:font script="Osma" typeface="Ebrima"/>
+        <a:font script="Phag" typeface="Phagspa"/>
+        <a:font script="Syrn" typeface="Estrangelo Edessa"/>
+        <a:font script="Syrj" typeface="Estrangelo Edessa"/>
+        <a:font script="Syre" typeface="Estrangelo Edessa"/>
+        <a:font script="Sora" typeface="Nirmala UI"/>
+        <a:font script="Tale" typeface="Microsoft Tai Le"/>
+        <a:font script="Talu" typeface="Microsoft New Tai Lue"/>
+        <a:font script="Tfng" typeface="Ebrima"/>
+      </a:majorFont>
+      <a:minorFont>
+        <a:latin typeface="Aptos" panose="02110004020202020204"/>
+        <a:ea typeface=""/>
+        <a:cs typeface=""/>
+        <a:font script="Jpan" typeface="游ゴシック"/>
+        <a:font script="Hang" typeface="맑은 고딕"/>
+        <a:font script="Hans" typeface="等线"/>
+        <a:font script="Hant" typeface="新細明體"/>
+        <a:font script="Arab" typeface="Arial"/>
+        <a:font script="Hebr" typeface="Arial"/>
+        <a:font script="Thai" typeface="Cordia New"/>
+        <a:font script="Ethi" typeface="Nyala"/>
+        <a:font script="Beng" typeface="Vrinda"/>
+        <a:font script="Gujr" typeface="Shruti"/>
+        <a:font script="Khmr" typeface="DaunPenh"/>
+        <a:font script="Knda" typeface="Tunga"/>
+        <a:font script="Guru" typeface="Raavi"/>
+        <a:font script="Cans" typeface="Euphemia"/>
+        <a:font script="Cher" typeface="Plantagenet Cherokee"/>
+        <a:font script="Yiii" typeface="Microsoft Yi Baiti"/>
+        <a:font script="Tibt" typeface="Microsoft Himalaya"/>
+        <a:font script="Thaa" typeface="MV Boli"/>
+        <a:font script="Deva" typeface="Mangal"/>
+        <a:font script="Telu" typeface="Gautami"/>
+        <a:font script="Taml" typeface="Latha"/>
+        <a:font script="Syrc" typeface="Estrangelo Edessa"/>
+        <a:font script="Orya" typeface="Kalinga"/>
+        <a:font script="Mlym" typeface="Kartika"/>
+        <a:font script="Laoo" typeface="DokChampa"/>
+        <a:font script="Sinh" typeface="Iskoola Pota"/>
+        <a:font script="Mong" typeface="Mongolian Baiti"/>
+        <a:font script="Viet" typeface="Arial"/>
+        <a:font script="Uigh" typeface="Microsoft Uighur"/>
+        <a:font script="Geor" typeface="Sylfaen"/>
+        <a:font script="Armn" typeface="Arial"/>
+        <a:font script="Bugi" typeface="Leelawadee UI"/>
+        <a:font script="Bopo" typeface="Microsoft JhengHei"/>
+        <a:font script="Java" typeface="Javanese Text"/>
+        <a:font script="Lisu" typeface="Segoe UI"/>
+        <a:font script="Mymr" typeface="Myanmar Text"/>
+        <a:font script="Nkoo" typeface="Ebrima"/>
+        <a:font script="Olck" typeface="Nirmala UI"/>
+        <a:font script="Osma" typeface="Ebrima"/>
+        <a:font script="Phag" typeface="Phagspa"/>
+        <a:font script="Syrn" typeface="Estrangelo Edessa"/>
+        <a:font script="Syrj" typeface="Estrangelo Edessa"/>
+        <a:font script="Syre" typeface="Estrangelo Edessa"/>
+        <a:font script="Sora" typeface="Nirmala UI"/>
+        <a:font script="Tale" typeface="Microsoft Tai Le"/>
+        <a:font script="Talu" typeface="Microsoft New Tai Lue"/>
+        <a:font script="Tfng" typeface="Ebrima"/>
+      </a:minorFont>
+    </a:fontScheme>
+    <a:fmtScheme name="Office">
+      <a:fillStyleLst>
+        <a:solidFill>
+          <a:schemeClr val="phClr"/>
+        </a:solidFill>
+        <a:gradFill rotWithShape="1">
+          <a:gsLst>
+            <a:gs pos="0">
+              <a:schemeClr val="phClr">
+                <a:lumMod val="110000"/>
+                <a:satMod val="105000"/>
+                <a:tint val="67000"/>
+              </a:schemeClr>
+            </a:gs>
+            <a:gs pos="50000">
+              <a:schemeClr val="phClr">
+                <a:lumMod val="105000"/>
+                <a:satMod val="103000"/>
+                <a:tint val="73000"/>
+              </a:schemeClr>
+            </a:gs>
+            <a:gs pos="100000">
+              <a:schemeClr val="phClr">
+                <a:lumMod val="105000"/>
+                <a:satMod val="109000"/>
+                <a:tint val="81000"/>
+              </a:schemeClr>
+            </a:gs>
+          </a:gsLst>
+          <a:lin ang="5400000" scaled="0"/>
+        </a:gradFill>
+        <a:gradFill rotWithShape="1">
+          <a:gsLst>
+            <a:gs pos="0">
+              <a:schemeClr val="phClr">
+                <a:satMod val="103000"/>
+                <a:lumMod val="102000"/>
+                <a:tint val="94000"/>
+              </a:schemeClr>
+            </a:gs>
+            <a:gs pos="50000">
+              <a:schemeClr val="phClr">
+                <a:satMod val="110000"/>
+                <a:lumMod val="100000"/>
+                <a:shade val="100000"/>
+              </a:schemeClr>
+            </a:gs>
+            <a:gs pos="100000">
+              <a:schemeClr val="phClr">
+                <a:lumMod val="99000"/>
+                <a:satMod val="120000"/>
+                <a:shade val="78000"/>
+              </a:schemeClr>
+            </a:gs>
+          </a:gsLst>
+          <a:lin ang="5400000" scaled="0"/>
+        </a:gradFill>
+      </a:fillStyleLst>
+      <a:lnStyleLst>
+        <a:ln w="12700" cap="flat" cmpd="sng" algn="ctr">
+          <a:solidFill>
+            <a:schemeClr val="phClr"/>
+          </a:solidFill>
+          <a:prstDash val="solid"/>
+          <a:miter lim="800000"/>
+        </a:ln>
+        <a:ln w="19050" cap="flat" cmpd="sng" algn="ctr">
+          <a:solidFill>
+            <a:schemeClr val="phClr"/>
+          </a:solidFill>
+          <a:prstDash val="solid"/>
+          <a:miter lim="800000"/>
+        </a:ln>
+        <a:ln w="25400" cap="flat" cmpd="sng" algn="ctr">
+          <a:solidFill>
+            <a:schemeClr val="phClr"/>
+          </a:solidFill>
+          <a:prstDash val="solid"/>
+          <a:miter lim="800000"/>
+        </a:ln>
+      </a:lnStyleLst>
+      <a:effectStyleLst>
+        <a:effectStyle>
+          <a:effectLst/>
+        </a:effectStyle>
+        <a:effectStyle>
+          <a:effectLst/>
+        </a:effectStyle>
+        <a:effectStyle>
+          <a:effectLst>
+            <a:outerShdw blurRad="57150" dist="19050" dir="5400000" algn="ctr" rotWithShape="0">
+              <a:srgbClr val="000000">
+                <a:alpha val="63000"/>
+              </a:srgbClr>
+            </a:outerShdw>
+          </a:effectLst>
+        </a:effectStyle>
+      </a:effectStyleLst>
+      <a:bgFillStyleLst>
+        <a:solidFill>
+          <a:schemeClr val="phClr"/>
+        </a:solidFill>
+        <a:solidFill>
+          <a:schemeClr val="phClr">
+            <a:tint val="95000"/>
+            <a:satMod val="170000"/>
+          </a:schemeClr>
+        </a:solidFill>
+        <a:gradFill rotWithShape="1">
+          <a:gsLst>
+            <a:gs pos="0">
+              <a:schemeClr val="phClr">
+                <a:tint val="93000"/>
+                <a:satMod val="150000"/>
+                <a:shade val="98000"/>
+                <a:lumMod val="102000"/>
+              </a:schemeClr>
+            </a:gs>
+            <a:gs pos="50000">
+              <a:schemeClr val="phClr">
+                <a:tint val="98000"/>
+                <a:satMod val="130000"/>
+                <a:shade val="90000"/>
+                <a:lumMod val="103000"/>
+              </a:schemeClr>
+            </a:gs>
+            <a:gs pos="100000">
+              <a:schemeClr val="phClr">
+                <a:shade val="63000"/>
+                <a:satMod val="120000"/>
+              </a:schemeClr>
+            </a:gs>
+          </a:gsLst>
+          <a:lin ang="5400000" scaled="0"/>
+        </a:gradFill>
+      </a:bgFillStyleLst>
+    </a:fmtScheme>
+  </a:themeElements>
+  <a:objectDefaults>
+    <a:lnDef>
+      <a:spPr/>
+      <a:bodyPr/>
+      <a:lstStyle/>
+      <a:style>
+        <a:lnRef idx="2">
+          <a:schemeClr val="accent1"/>
+        </a:lnRef>
+        <a:fillRef idx="0">
+          <a:schemeClr val="accent1"/>
+        </a:fillRef>
+        <a:effectRef idx="1">
+          <a:schemeClr val="accent1"/>
+        </a:effectRef>
+        <a:fontRef idx="minor">
+          <a:schemeClr val="tx1"/>
+        </a:fontRef>
+      </a:style>
+    </a:lnDef>
+  </a:objectDefaults>
+  <a:extraClrSchemeLst/>
+  <a:extLst>
+    <a:ext uri="{05A4C25C-085E-4340-85A3-A5531E510DB2}">
+      <thm15:themeFamily xmlns:thm15="http://schemas.microsoft.com/office/thememl/2012/main" name="Office Theme" id="{2E142A2C-CD16-42D6-873A-C26D2A0506FA}" vid="{1BDDFF52-6CD6-40A5-AB3C-68EB2F1E4D0A}"/>
+    </a:ext>
+  </a:extLst>
+</a:theme>
 </file>